--- a/results/talk_qvf_wikistate_20260904.pptx
+++ b/results/talk_qvf_wikistate_20260904.pptx
@@ -34959,7 +34959,7 @@
                 <a:ea typeface="Cambria" pitchFamily="34" charset="-122"/>
                 <a:cs typeface="Cambria" pitchFamily="34" charset="-120"/>
               </a:rPr>
-              <a:t>WikiState: what reviewers found, what we fixed, and where evaluation stands</a:t>
+              <a:t>WikiState: reviewer findings, fixes, and evaluation status</a:t>
             </a:r>
             <a:endParaRPr lang="en-US" sz="2800" dirty="0"/>
           </a:p>
@@ -43509,7 +43509,7 @@
                 <a:ea typeface="Cambria" pitchFamily="34" charset="-122"/>
                 <a:cs typeface="Cambria" pitchFamily="34" charset="-120"/>
               </a:rPr>
-              <a:t>Step 4 · Ledger + protocol: show the table, list the trajectory, then answer</a:t>
+              <a:t>Step 4 · Ledger + protocol: list the trajectory, then answer</a:t>
             </a:r>
             <a:endParaRPr lang="en-US" sz="2800" dirty="0"/>
           </a:p>

--- a/results/talk_qvf_wikistate_20260904.pptx
+++ b/results/talk_qvf_wikistate_20260904.pptx
@@ -4390,7 +4390,7 @@
                 <a:gridCol w="4023360"/>
                 <a:gridCol w="3474720"/>
               </a:tblGrid>
-              <a:tr h="457200">
+              <a:tr h="420624">
                 <a:tc>
                   <a:txBody>
                     <a:bodyPr/>
@@ -4400,7 +4400,7 @@
                         <a:buNone/>
                       </a:pPr>
                       <a:r>
-                        <a:rPr lang="en-US" sz="1050" b="1" dirty="0">
+                        <a:rPr lang="en-US" sz="1000" b="1" dirty="0">
                           <a:solidFill>
                             <a:srgbClr val="FFFFFF"/>
                           </a:solidFill>
@@ -4410,7 +4410,7 @@
                         </a:rPr>
                         <a:t>Test</a:t>
                       </a:r>
-                      <a:endParaRPr lang="en-US" sz="1050" dirty="0">
+                      <a:endParaRPr lang="en-US" sz="1000" dirty="0">
                         <a:latin typeface="Calibri" charset="0"/>
                         <a:ea typeface="Calibri" charset="0"/>
                         <a:cs typeface="Calibri" charset="0"/>
@@ -4468,7 +4468,7 @@
                         <a:buNone/>
                       </a:pPr>
                       <a:r>
-                        <a:rPr lang="en-US" sz="1050" b="1" dirty="0">
+                        <a:rPr lang="en-US" sz="1000" b="1" dirty="0">
                           <a:solidFill>
                             <a:srgbClr val="FFFFFF"/>
                           </a:solidFill>
@@ -4478,7 +4478,7 @@
                         </a:rPr>
                         <a:t>Result</a:t>
                       </a:r>
-                      <a:endParaRPr lang="en-US" sz="1050" dirty="0">
+                      <a:endParaRPr lang="en-US" sz="1000" dirty="0">
                         <a:latin typeface="Calibri" charset="0"/>
                         <a:ea typeface="Calibri" charset="0"/>
                         <a:cs typeface="Calibri" charset="0"/>
@@ -4536,7 +4536,7 @@
                         <a:buNone/>
                       </a:pPr>
                       <a:r>
-                        <a:rPr lang="en-US" sz="1050" b="1" dirty="0">
+                        <a:rPr lang="en-US" sz="1000" b="1" dirty="0">
                           <a:solidFill>
                             <a:srgbClr val="FFFFFF"/>
                           </a:solidFill>
@@ -4546,7 +4546,7 @@
                         </a:rPr>
                         <a:t>Rules out</a:t>
                       </a:r>
-                      <a:endParaRPr lang="en-US" sz="1050" dirty="0">
+                      <a:endParaRPr lang="en-US" sz="1000" dirty="0">
                         <a:latin typeface="Calibri" charset="0"/>
                         <a:ea typeface="Calibri" charset="0"/>
                         <a:cs typeface="Calibri" charset="0"/>
@@ -4596,7 +4596,7 @@
                   </a:tcPr>
                 </a:tc>
               </a:tr>
-              <a:tr h="457200">
+              <a:tr h="420624">
                 <a:tc>
                   <a:txBody>
                     <a:bodyPr/>
@@ -4606,7 +4606,7 @@
                         <a:buNone/>
                       </a:pPr>
                       <a:r>
-                        <a:rPr lang="en-US" sz="1050" dirty="0">
+                        <a:rPr lang="en-US" sz="1000" dirty="0">
                           <a:solidFill>
                             <a:srgbClr val="1F2937"/>
                           </a:solidFill>
@@ -4616,7 +4616,7 @@
                         </a:rPr>
                         <a:t>Perfect gold-sentence evidence fed to the direct reader</a:t>
                       </a:r>
-                      <a:endParaRPr lang="en-US" sz="1050" dirty="0">
+                      <a:endParaRPr lang="en-US" sz="1000" dirty="0">
                         <a:latin typeface="Calibri" charset="0"/>
                         <a:ea typeface="Calibri" charset="0"/>
                         <a:cs typeface="Calibri" charset="0"/>
@@ -4674,7 +4674,7 @@
                         <a:buNone/>
                       </a:pPr>
                       <a:r>
-                        <a:rPr lang="en-US" sz="1050" dirty="0">
+                        <a:rPr lang="en-US" sz="1000" dirty="0">
                           <a:solidFill>
                             <a:srgbClr val="1F2937"/>
                           </a:solidFill>
@@ -4684,7 +4684,7 @@
                         </a:rPr>
                         <a:t>76.7 vs ledger 82.6 (p = 8e-11)</a:t>
                       </a:r>
-                      <a:endParaRPr lang="en-US" sz="1050" dirty="0">
+                      <a:endParaRPr lang="en-US" sz="1000" dirty="0">
                         <a:latin typeface="Calibri" charset="0"/>
                         <a:ea typeface="Calibri" charset="0"/>
                         <a:cs typeface="Calibri" charset="0"/>
@@ -4742,7 +4742,7 @@
                         <a:buNone/>
                       </a:pPr>
                       <a:r>
-                        <a:rPr lang="en-US" sz="1050" dirty="0">
+                        <a:rPr lang="en-US" sz="1000" dirty="0">
                           <a:solidFill>
                             <a:srgbClr val="1F2937"/>
                           </a:solidFill>
@@ -4752,7 +4752,7 @@
                         </a:rPr>
                         <a:t>“it is just a retrieval gap”</a:t>
                       </a:r>
-                      <a:endParaRPr lang="en-US" sz="1050" dirty="0">
+                      <a:endParaRPr lang="en-US" sz="1000" dirty="0">
                         <a:latin typeface="Calibri" charset="0"/>
                         <a:ea typeface="Calibri" charset="0"/>
                         <a:cs typeface="Calibri" charset="0"/>
@@ -4802,7 +4802,7 @@
                   </a:tcPr>
                 </a:tc>
               </a:tr>
-              <a:tr h="457200">
+              <a:tr h="420624">
                 <a:tc>
                   <a:txBody>
                     <a:bodyPr/>
@@ -4812,7 +4812,7 @@
                         <a:buNone/>
                       </a:pPr>
                       <a:r>
-                        <a:rPr lang="en-US" sz="1050" dirty="0">
+                        <a:rPr lang="en-US" sz="1000" dirty="0">
                           <a:solidFill>
                             <a:srgbClr val="1F2937"/>
                           </a:solidFill>
@@ -4822,7 +4822,7 @@
                         </a:rPr>
                         <a:t>Remove all filler sessions</a:t>
                       </a:r>
-                      <a:endParaRPr lang="en-US" sz="1050" dirty="0">
+                      <a:endParaRPr lang="en-US" sz="1000" dirty="0">
                         <a:latin typeface="Calibri" charset="0"/>
                         <a:ea typeface="Calibri" charset="0"/>
                         <a:cs typeface="Calibri" charset="0"/>
@@ -4880,7 +4880,7 @@
                         <a:buNone/>
                       </a:pPr>
                       <a:r>
-                        <a:rPr lang="en-US" sz="1050" dirty="0">
+                        <a:rPr lang="en-US" sz="1000" dirty="0">
                           <a:solidFill>
                             <a:srgbClr val="1F2937"/>
                           </a:solidFill>
@@ -4890,7 +4890,7 @@
                         </a:rPr>
                         <a:t>direct +22.5, full text +20.0, ledger +1.7</a:t>
                       </a:r>
-                      <a:endParaRPr lang="en-US" sz="1050" dirty="0">
+                      <a:endParaRPr lang="en-US" sz="1000" dirty="0">
                         <a:latin typeface="Calibri" charset="0"/>
                         <a:ea typeface="Calibri" charset="0"/>
                         <a:cs typeface="Calibri" charset="0"/>
@@ -4948,7 +4948,7 @@
                         <a:buNone/>
                       </a:pPr>
                       <a:r>
-                        <a:rPr lang="en-US" sz="1050" dirty="0">
+                        <a:rPr lang="en-US" sz="1000" dirty="0">
                           <a:solidFill>
                             <a:srgbClr val="1F2937"/>
                           </a:solidFill>
@@ -4958,7 +4958,7 @@
                         </a:rPr>
                         <a:t>— (quantifies the distractor share: 44%)</a:t>
                       </a:r>
-                      <a:endParaRPr lang="en-US" sz="1050" dirty="0">
+                      <a:endParaRPr lang="en-US" sz="1000" dirty="0">
                         <a:latin typeface="Calibri" charset="0"/>
                         <a:ea typeface="Calibri" charset="0"/>
                         <a:cs typeface="Calibri" charset="0"/>
@@ -5008,7 +5008,7 @@
                   </a:tcPr>
                 </a:tc>
               </a:tr>
-              <a:tr h="457200">
+              <a:tr h="420624">
                 <a:tc>
                   <a:txBody>
                     <a:bodyPr/>
@@ -5018,7 +5018,7 @@
                         <a:buNone/>
                       </a:pPr>
                       <a:r>
-                        <a:rPr lang="en-US" sz="1050" dirty="0">
+                        <a:rPr lang="en-US" sz="1000" dirty="0">
                           <a:solidFill>
                             <a:srgbClr val="1F2937"/>
                           </a:solidFill>
@@ -5028,7 +5028,7 @@
                         </a:rPr>
                         <a:t>Unstructured summary at equal token budget</a:t>
                       </a:r>
-                      <a:endParaRPr lang="en-US" sz="1050" dirty="0">
+                      <a:endParaRPr lang="en-US" sz="1000" dirty="0">
                         <a:latin typeface="Calibri" charset="0"/>
                         <a:ea typeface="Calibri" charset="0"/>
                         <a:cs typeface="Calibri" charset="0"/>
@@ -5086,7 +5086,7 @@
                         <a:buNone/>
                       </a:pPr>
                       <a:r>
-                        <a:rPr lang="en-US" sz="1050" dirty="0">
+                        <a:rPr lang="en-US" sz="1000" dirty="0">
                           <a:solidFill>
                             <a:srgbClr val="1F2937"/>
                           </a:solidFill>
@@ -5096,7 +5096,7 @@
                         </a:rPr>
                         <a:t>52.8 = full text 52.3 (p = 0.89); summary → bare ledger +22.6 (p = 2e-21)</a:t>
                       </a:r>
-                      <a:endParaRPr lang="en-US" sz="1050" dirty="0">
+                      <a:endParaRPr lang="en-US" sz="1000" dirty="0">
                         <a:latin typeface="Calibri" charset="0"/>
                         <a:ea typeface="Calibri" charset="0"/>
                         <a:cs typeface="Calibri" charset="0"/>
@@ -5154,7 +5154,7 @@
                         <a:buNone/>
                       </a:pPr>
                       <a:r>
-                        <a:rPr lang="en-US" sz="1050" dirty="0">
+                        <a:rPr lang="en-US" sz="1000" dirty="0">
                           <a:solidFill>
                             <a:srgbClr val="1F2937"/>
                           </a:solidFill>
@@ -5164,7 +5164,7 @@
                         </a:rPr>
                         <a:t>“it is just shorter”</a:t>
                       </a:r>
-                      <a:endParaRPr lang="en-US" sz="1050" dirty="0">
+                      <a:endParaRPr lang="en-US" sz="1000" dirty="0">
                         <a:latin typeface="Calibri" charset="0"/>
                         <a:ea typeface="Calibri" charset="0"/>
                         <a:cs typeface="Calibri" charset="0"/>
@@ -5214,7 +5214,7 @@
                   </a:tcPr>
                 </a:tc>
               </a:tr>
-              <a:tr h="457200">
+              <a:tr h="420624">
                 <a:tc>
                   <a:txBody>
                     <a:bodyPr/>
@@ -5224,7 +5224,7 @@
                         <a:buNone/>
                       </a:pPr>
                       <a:r>
-                        <a:rPr lang="en-US" sz="1050" dirty="0">
+                        <a:rPr lang="en-US" sz="1000" dirty="0">
                           <a:solidFill>
                             <a:srgbClr val="1F2937"/>
                           </a:solidFill>
@@ -5234,7 +5234,7 @@
                         </a:rPr>
                         <a:t>Remove verbatim anchors</a:t>
                       </a:r>
-                      <a:endParaRPr lang="en-US" sz="1050" dirty="0">
+                      <a:endParaRPr lang="en-US" sz="1000" dirty="0">
                         <a:latin typeface="Calibri" charset="0"/>
                         <a:ea typeface="Calibri" charset="0"/>
                         <a:cs typeface="Calibri" charset="0"/>
@@ -5292,7 +5292,7 @@
                         <a:buNone/>
                       </a:pPr>
                       <a:r>
-                        <a:rPr lang="en-US" sz="1050" dirty="0">
+                        <a:rPr lang="en-US" sz="1000" dirty="0">
                           <a:solidFill>
                             <a:srgbClr val="1F2937"/>
                           </a:solidFill>
@@ -5302,7 +5302,7 @@
                         </a:rPr>
                         <a:t>77.3 vs 82.6, −5.4 (p = 1e-4)</a:t>
                       </a:r>
-                      <a:endParaRPr lang="en-US" sz="1050" dirty="0">
+                      <a:endParaRPr lang="en-US" sz="1000" dirty="0">
                         <a:latin typeface="Calibri" charset="0"/>
                         <a:ea typeface="Calibri" charset="0"/>
                         <a:cs typeface="Calibri" charset="0"/>
@@ -5360,7 +5360,7 @@
                         <a:buNone/>
                       </a:pPr>
                       <a:r>
-                        <a:rPr lang="en-US" sz="1050" dirty="0">
+                        <a:rPr lang="en-US" sz="1000" dirty="0">
                           <a:solidFill>
                             <a:srgbClr val="1F2937"/>
                           </a:solidFill>
@@ -5370,7 +5370,7 @@
                         </a:rPr>
                         <a:t>“anchors are decoration”</a:t>
                       </a:r>
-                      <a:endParaRPr lang="en-US" sz="1050" dirty="0">
+                      <a:endParaRPr lang="en-US" sz="1000" dirty="0">
                         <a:latin typeface="Calibri" charset="0"/>
                         <a:ea typeface="Calibri" charset="0"/>
                         <a:cs typeface="Calibri" charset="0"/>
@@ -5420,7 +5420,7 @@
                   </a:tcPr>
                 </a:tc>
               </a:tr>
-              <a:tr h="457200">
+              <a:tr h="420624">
                 <a:tc>
                   <a:txBody>
                     <a:bodyPr/>
@@ -5430,7 +5430,7 @@
                         <a:buNone/>
                       </a:pPr>
                       <a:r>
-                        <a:rPr lang="en-US" sz="1050" dirty="0">
+                        <a:rPr lang="en-US" sz="1000" dirty="0">
                           <a:solidFill>
                             <a:srgbClr val="1F2937"/>
                           </a:solidFill>
@@ -5440,7 +5440,7 @@
                         </a:rPr>
                         <a:t>Build the ledger at read time from the top-10 turns</a:t>
                       </a:r>
-                      <a:endParaRPr lang="en-US" sz="1050" dirty="0">
+                      <a:endParaRPr lang="en-US" sz="1000" dirty="0">
                         <a:latin typeface="Calibri" charset="0"/>
                         <a:ea typeface="Calibri" charset="0"/>
                         <a:cs typeface="Calibri" charset="0"/>
@@ -5498,7 +5498,7 @@
                         <a:buNone/>
                       </a:pPr>
                       <a:r>
-                        <a:rPr lang="en-US" sz="1050" dirty="0">
+                        <a:rPr lang="en-US" sz="1000" dirty="0">
                           <a:solidFill>
                             <a:srgbClr val="1F2937"/>
                           </a:solidFill>
@@ -5508,7 +5508,7 @@
                         </a:rPr>
                         <a:t>60.2; 85.3 with full coverage, 15.9 with one session missing</a:t>
                       </a:r>
-                      <a:endParaRPr lang="en-US" sz="1050" dirty="0">
+                      <a:endParaRPr lang="en-US" sz="1000" dirty="0">
                         <a:latin typeface="Calibri" charset="0"/>
                         <a:ea typeface="Calibri" charset="0"/>
                         <a:cs typeface="Calibri" charset="0"/>
@@ -5566,7 +5566,7 @@
                         <a:buNone/>
                       </a:pPr>
                       <a:r>
-                        <a:rPr lang="en-US" sz="1050" dirty="0">
+                        <a:rPr lang="en-US" sz="1000" dirty="0">
                           <a:solidFill>
                             <a:srgbClr val="1F2937"/>
                           </a:solidFill>
@@ -5576,7 +5576,7 @@
                         </a:rPr>
                         <a:t>“write time does not matter”</a:t>
                       </a:r>
-                      <a:endParaRPr lang="en-US" sz="1050" dirty="0">
+                      <a:endParaRPr lang="en-US" sz="1000" dirty="0">
                         <a:latin typeface="Calibri" charset="0"/>
                         <a:ea typeface="Calibri" charset="0"/>
                         <a:cs typeface="Calibri" charset="0"/>
@@ -5626,7 +5626,7 @@
                   </a:tcPr>
                 </a:tc>
               </a:tr>
-              <a:tr h="457200">
+              <a:tr h="420624">
                 <a:tc>
                   <a:txBody>
                     <a:bodyPr/>
@@ -5636,7 +5636,7 @@
                         <a:buNone/>
                       </a:pPr>
                       <a:r>
-                        <a:rPr lang="en-US" sz="1050" dirty="0">
+                        <a:rPr lang="en-US" sz="1000" dirty="0">
                           <a:solidFill>
                             <a:srgbClr val="1F2937"/>
                           </a:solidFill>
@@ -5646,7 +5646,7 @@
                         </a:rPr>
                         <a:t>Oracle cards / oracle evidence</a:t>
                       </a:r>
-                      <a:endParaRPr lang="en-US" sz="1050" dirty="0">
+                      <a:endParaRPr lang="en-US" sz="1000" dirty="0">
                         <a:latin typeface="Calibri" charset="0"/>
                         <a:ea typeface="Calibri" charset="0"/>
                         <a:cs typeface="Calibri" charset="0"/>
@@ -5704,7 +5704,7 @@
                         <a:buNone/>
                       </a:pPr>
                       <a:r>
-                        <a:rPr lang="en-US" sz="1050" dirty="0">
+                        <a:rPr lang="en-US" sz="1000" dirty="0">
                           <a:solidFill>
                             <a:srgbClr val="1F2937"/>
                           </a:solidFill>
@@ -5714,7 +5714,7 @@
                         </a:rPr>
                         <a:t>94.97 / 76.74</a:t>
                       </a:r>
-                      <a:endParaRPr lang="en-US" sz="1050" dirty="0">
+                      <a:endParaRPr lang="en-US" sz="1000" dirty="0">
                         <a:latin typeface="Calibri" charset="0"/>
                         <a:ea typeface="Calibri" charset="0"/>
                         <a:cs typeface="Calibri" charset="0"/>
@@ -5772,7 +5772,7 @@
                         <a:buNone/>
                       </a:pPr>
                       <a:r>
-                        <a:rPr lang="en-US" sz="1050" dirty="0">
+                        <a:rPr lang="en-US" sz="1000" dirty="0">
                           <a:solidFill>
                             <a:srgbClr val="1F2937"/>
                           </a:solidFill>
@@ -5782,7 +5782,7 @@
                         </a:rPr>
                         <a:t>— (write-side headroom +4.5; residual 55 errors = write 38 · read 13 · gold+judge 4)</a:t>
                       </a:r>
-                      <a:endParaRPr lang="en-US" sz="1050" dirty="0">
+                      <a:endParaRPr lang="en-US" sz="1000" dirty="0">
                         <a:latin typeface="Calibri" charset="0"/>
                         <a:ea typeface="Calibri" charset="0"/>
                         <a:cs typeface="Calibri" charset="0"/>
@@ -5832,7 +5832,7 @@
                   </a:tcPr>
                 </a:tc>
               </a:tr>
-              <a:tr h="457200">
+              <a:tr h="420624">
                 <a:tc>
                   <a:txBody>
                     <a:bodyPr/>
@@ -5842,7 +5842,7 @@
                         <a:buNone/>
                       </a:pPr>
                       <a:r>
-                        <a:rPr lang="en-US" sz="1050" dirty="0">
+                        <a:rPr lang="en-US" sz="1000" dirty="0">
                           <a:solidFill>
                             <a:srgbClr val="1F2937"/>
                           </a:solidFill>
@@ -5852,7 +5852,7 @@
                         </a:rPr>
                         <a:t>Second-family judge (gpt-5-mini) re-judges 2,304 rows</a:t>
                       </a:r>
-                      <a:endParaRPr lang="en-US" sz="1050" dirty="0">
+                      <a:endParaRPr lang="en-US" sz="1000" dirty="0">
                         <a:latin typeface="Calibri" charset="0"/>
                         <a:ea typeface="Calibri" charset="0"/>
                         <a:cs typeface="Calibri" charset="0"/>
@@ -5910,7 +5910,7 @@
                         <a:buNone/>
                       </a:pPr>
                       <a:r>
-                        <a:rPr lang="en-US" sz="1050" dirty="0">
+                        <a:rPr lang="en-US" sz="1000" dirty="0">
                           <a:solidFill>
                             <a:srgbClr val="1F2937"/>
                           </a:solidFill>
@@ -5920,7 +5920,7 @@
                         </a:rPr>
                         <a:t>agreement 89–97%, κ 0.78–0.91; ledger − direct widens to +48.6</a:t>
                       </a:r>
-                      <a:endParaRPr lang="en-US" sz="1050" dirty="0">
+                      <a:endParaRPr lang="en-US" sz="1000" dirty="0">
                         <a:latin typeface="Calibri" charset="0"/>
                         <a:ea typeface="Calibri" charset="0"/>
                         <a:cs typeface="Calibri" charset="0"/>
@@ -5978,7 +5978,7 @@
                         <a:buNone/>
                       </a:pPr>
                       <a:r>
-                        <a:rPr lang="en-US" sz="1050" dirty="0">
+                        <a:rPr lang="en-US" sz="1000" dirty="0">
                           <a:solidFill>
                             <a:srgbClr val="1F2937"/>
                           </a:solidFill>
@@ -5988,7 +5988,7 @@
                         </a:rPr>
                         <a:t>“the judge favours QVF”</a:t>
                       </a:r>
-                      <a:endParaRPr lang="en-US" sz="1050" dirty="0">
+                      <a:endParaRPr lang="en-US" sz="1000" dirty="0">
                         <a:latin typeface="Calibri" charset="0"/>
                         <a:ea typeface="Calibri" charset="0"/>
                         <a:cs typeface="Calibri" charset="0"/>
@@ -6038,7 +6038,7 @@
                   </a:tcPr>
                 </a:tc>
               </a:tr>
-              <a:tr h="457200">
+              <a:tr h="420624">
                 <a:tc>
                   <a:txBody>
                     <a:bodyPr/>
@@ -6048,7 +6048,7 @@
                         <a:buNone/>
                       </a:pPr>
                       <a:r>
-                        <a:rPr lang="en-US" sz="1050" dirty="0">
+                        <a:rPr lang="en-US" sz="1000" dirty="0">
                           <a:solidFill>
                             <a:srgbClr val="1F2937"/>
                           </a:solidFill>
@@ -6058,7 +6058,7 @@
                         </a:rPr>
                         <a:t>80 holdout chains, zero QID overlap (two independent draws)</a:t>
                       </a:r>
-                      <a:endParaRPr lang="en-US" sz="1050" dirty="0">
+                      <a:endParaRPr lang="en-US" sz="1000" dirty="0">
                         <a:latin typeface="Calibri" charset="0"/>
                         <a:ea typeface="Calibri" charset="0"/>
                         <a:cs typeface="Calibri" charset="0"/>
@@ -6116,7 +6116,7 @@
                         <a:buNone/>
                       </a:pPr>
                       <a:r>
-                        <a:rPr lang="en-US" sz="1050" dirty="0">
+                        <a:rPr lang="en-US" sz="1000" dirty="0">
                           <a:solidFill>
                             <a:srgbClr val="1F2937"/>
                           </a:solidFill>
@@ -6126,7 +6126,7 @@
                         </a:rPr>
                         <a:t>+40.0 and +43.1 on the two halves; pooled +41.56 vs main field +41.49</a:t>
                       </a:r>
-                      <a:endParaRPr lang="en-US" sz="1050" dirty="0">
+                      <a:endParaRPr lang="en-US" sz="1000" dirty="0">
                         <a:latin typeface="Calibri" charset="0"/>
                         <a:ea typeface="Calibri" charset="0"/>
                         <a:cs typeface="Calibri" charset="0"/>
@@ -6184,7 +6184,7 @@
                         <a:buNone/>
                       </a:pPr>
                       <a:r>
-                        <a:rPr lang="en-US" sz="1050" dirty="0">
+                        <a:rPr lang="en-US" sz="1000" dirty="0">
                           <a:solidFill>
                             <a:srgbClr val="1F2937"/>
                           </a:solidFill>
@@ -6194,7 +6194,7 @@
                         </a:rPr>
                         <a:t>“over-fitted to the development chains”</a:t>
                       </a:r>
-                      <a:endParaRPr lang="en-US" sz="1050" dirty="0">
+                      <a:endParaRPr lang="en-US" sz="1000" dirty="0">
                         <a:latin typeface="Calibri" charset="0"/>
                         <a:ea typeface="Calibri" charset="0"/>
                         <a:cs typeface="Calibri" charset="0"/>
@@ -6244,7 +6244,7 @@
                   </a:tcPr>
                 </a:tc>
               </a:tr>
-              <a:tr h="457200">
+              <a:tr h="420624">
                 <a:tc>
                   <a:txBody>
                     <a:bodyPr/>
@@ -6254,7 +6254,7 @@
                         <a:buNone/>
                       </a:pPr>
                       <a:r>
-                        <a:rPr lang="en-US" sz="1050" dirty="0">
+                        <a:rPr lang="en-US" sz="1000" dirty="0">
                           <a:solidFill>
                             <a:srgbClr val="1F2937"/>
                           </a:solidFill>
@@ -6264,7 +6264,7 @@
                         </a:rPr>
                         <a:t>Nine retrieval variants incl. top-50 (99.8% anchor coverage) and LLM rerank</a:t>
                       </a:r>
-                      <a:endParaRPr lang="en-US" sz="1050" dirty="0">
+                      <a:endParaRPr lang="en-US" sz="1000" dirty="0">
                         <a:latin typeface="Calibri" charset="0"/>
                         <a:ea typeface="Calibri" charset="0"/>
                         <a:cs typeface="Calibri" charset="0"/>
@@ -6322,7 +6322,7 @@
                         <a:buNone/>
                       </a:pPr>
                       <a:r>
-                        <a:rPr lang="en-US" sz="1050" dirty="0">
+                        <a:rPr lang="en-US" sz="1000" dirty="0">
                           <a:solidFill>
                             <a:srgbClr val="1F2937"/>
                           </a:solidFill>
@@ -6332,7 +6332,7 @@
                         </a:rPr>
                         <a:t>best 62.9 vs ledger 91.4 (p = 5e-10)</a:t>
                       </a:r>
-                      <a:endParaRPr lang="en-US" sz="1050" dirty="0">
+                      <a:endParaRPr lang="en-US" sz="1000" dirty="0">
                         <a:latin typeface="Calibri" charset="0"/>
                         <a:ea typeface="Calibri" charset="0"/>
                         <a:cs typeface="Calibri" charset="0"/>
@@ -6390,7 +6390,7 @@
                         <a:buNone/>
                       </a:pPr>
                       <a:r>
-                        <a:rPr lang="en-US" sz="1050" dirty="0">
+                        <a:rPr lang="en-US" sz="1000" dirty="0">
                           <a:solidFill>
                             <a:srgbClr val="1F2937"/>
                           </a:solidFill>
@@ -6400,7 +6400,7 @@
                         </a:rPr>
                         <a:t>“a better retriever would do it”</a:t>
                       </a:r>
-                      <a:endParaRPr lang="en-US" sz="1050" dirty="0">
+                      <a:endParaRPr lang="en-US" sz="1000" dirty="0">
                         <a:latin typeface="Calibri" charset="0"/>
                         <a:ea typeface="Calibri" charset="0"/>
                         <a:cs typeface="Calibri" charset="0"/>
@@ -6446,6 +6446,212 @@
                     </a:lnB>
                     <a:solidFill>
                       <a:srgbClr val="FFFFFF"/>
+                    </a:solidFill>
+                  </a:tcPr>
+                </a:tc>
+              </a:tr>
+              <a:tr h="420624">
+                <a:tc>
+                  <a:txBody>
+                    <a:bodyPr/>
+                    <a:lstStyle/>
+                    <a:p>
+                      <a:pPr algn="l" indent="0" marL="0">
+                        <a:buNone/>
+                      </a:pPr>
+                      <a:r>
+                        <a:rPr lang="en-US" sz="1000" dirty="0">
+                          <a:solidFill>
+                            <a:srgbClr val="1F2937"/>
+                          </a:solidFill>
+                          <a:latin typeface="Calibri" pitchFamily="34" charset="0"/>
+                          <a:ea typeface="Calibri" pitchFamily="34" charset="-122"/>
+                          <a:cs typeface="Calibri" pitchFamily="34" charset="-120"/>
+                        </a:rPr>
+                        <a:t>Render-matched controls (same layout + protocol, mechanism off)</a:t>
+                      </a:r>
+                      <a:endParaRPr lang="en-US" sz="1000" dirty="0">
+                        <a:latin typeface="Calibri" charset="0"/>
+                        <a:ea typeface="Calibri" charset="0"/>
+                        <a:cs typeface="Calibri" charset="0"/>
+                      </a:endParaRPr>
+                    </a:p>
+                  </a:txBody>
+                  <a:tcPr marL="36576" marR="36576" marT="36576" marB="36576" anchor="ctr">
+                    <a:lnL w="6350" cap="flat" cmpd="sng" algn="ctr">
+                      <a:solidFill>
+                        <a:srgbClr val="D1D5DB"/>
+                      </a:solidFill>
+                      <a:prstDash val="solid"/>
+                      <a:round/>
+                      <a:headEnd type="none" w="med" len="med"/>
+                      <a:tailEnd type="none" w="med" len="med"/>
+                    </a:lnL>
+                    <a:lnR w="6350" cap="flat" cmpd="sng" algn="ctr">
+                      <a:solidFill>
+                        <a:srgbClr val="D1D5DB"/>
+                      </a:solidFill>
+                      <a:prstDash val="solid"/>
+                      <a:round/>
+                      <a:headEnd type="none" w="med" len="med"/>
+                      <a:tailEnd type="none" w="med" len="med"/>
+                    </a:lnR>
+                    <a:lnT w="6350" cap="flat" cmpd="sng" algn="ctr">
+                      <a:solidFill>
+                        <a:srgbClr val="D1D5DB"/>
+                      </a:solidFill>
+                      <a:prstDash val="solid"/>
+                      <a:round/>
+                      <a:headEnd type="none" w="med" len="med"/>
+                      <a:tailEnd type="none" w="med" len="med"/>
+                    </a:lnT>
+                    <a:lnB w="6350" cap="flat" cmpd="sng" algn="ctr">
+                      <a:solidFill>
+                        <a:srgbClr val="D1D5DB"/>
+                      </a:solidFill>
+                      <a:prstDash val="solid"/>
+                      <a:round/>
+                      <a:headEnd type="none" w="med" len="med"/>
+                      <a:tailEnd type="none" w="med" len="med"/>
+                    </a:lnB>
+                    <a:solidFill>
+                      <a:srgbClr val="F5F7FA"/>
+                    </a:solidFill>
+                  </a:tcPr>
+                </a:tc>
+                <a:tc>
+                  <a:txBody>
+                    <a:bodyPr/>
+                    <a:lstStyle/>
+                    <a:p>
+                      <a:pPr algn="ctr" indent="0" marL="0">
+                        <a:buNone/>
+                      </a:pPr>
+                      <a:r>
+                        <a:rPr lang="en-US" sz="1000" dirty="0">
+                          <a:solidFill>
+                            <a:srgbClr val="1F2937"/>
+                          </a:solidFill>
+                          <a:latin typeface="Calibri" pitchFamily="34" charset="0"/>
+                          <a:ea typeface="Calibri" pitchFamily="34" charset="-122"/>
+                          <a:cs typeface="Calibri" pitchFamily="34" charset="-120"/>
+                        </a:rPr>
+                        <a:t>14K: cards-only 85.0, raw quotes 85.4, ledger 89.3; 104K: cards-only 70.0, raw quotes 55.8, projection 61.7</a:t>
+                      </a:r>
+                      <a:endParaRPr lang="en-US" sz="1000" dirty="0">
+                        <a:latin typeface="Calibri" charset="0"/>
+                        <a:ea typeface="Calibri" charset="0"/>
+                        <a:cs typeface="Calibri" charset="0"/>
+                      </a:endParaRPr>
+                    </a:p>
+                  </a:txBody>
+                  <a:tcPr marL="36576" marR="36576" marT="36576" marB="36576" anchor="ctr">
+                    <a:lnL w="6350" cap="flat" cmpd="sng" algn="ctr">
+                      <a:solidFill>
+                        <a:srgbClr val="D1D5DB"/>
+                      </a:solidFill>
+                      <a:prstDash val="solid"/>
+                      <a:round/>
+                      <a:headEnd type="none" w="med" len="med"/>
+                      <a:tailEnd type="none" w="med" len="med"/>
+                    </a:lnL>
+                    <a:lnR w="6350" cap="flat" cmpd="sng" algn="ctr">
+                      <a:solidFill>
+                        <a:srgbClr val="D1D5DB"/>
+                      </a:solidFill>
+                      <a:prstDash val="solid"/>
+                      <a:round/>
+                      <a:headEnd type="none" w="med" len="med"/>
+                      <a:tailEnd type="none" w="med" len="med"/>
+                    </a:lnR>
+                    <a:lnT w="6350" cap="flat" cmpd="sng" algn="ctr">
+                      <a:solidFill>
+                        <a:srgbClr val="D1D5DB"/>
+                      </a:solidFill>
+                      <a:prstDash val="solid"/>
+                      <a:round/>
+                      <a:headEnd type="none" w="med" len="med"/>
+                      <a:tailEnd type="none" w="med" len="med"/>
+                    </a:lnT>
+                    <a:lnB w="6350" cap="flat" cmpd="sng" algn="ctr">
+                      <a:solidFill>
+                        <a:srgbClr val="D1D5DB"/>
+                      </a:solidFill>
+                      <a:prstDash val="solid"/>
+                      <a:round/>
+                      <a:headEnd type="none" w="med" len="med"/>
+                      <a:tailEnd type="none" w="med" len="med"/>
+                    </a:lnB>
+                    <a:solidFill>
+                      <a:srgbClr val="F5F7FA"/>
+                    </a:solidFill>
+                  </a:tcPr>
+                </a:tc>
+                <a:tc>
+                  <a:txBody>
+                    <a:bodyPr/>
+                    <a:lstStyle/>
+                    <a:p>
+                      <a:pPr algn="ctr" indent="0" marL="0">
+                        <a:buNone/>
+                      </a:pPr>
+                      <a:r>
+                        <a:rPr lang="en-US" sz="1000" dirty="0">
+                          <a:solidFill>
+                            <a:srgbClr val="1F2937"/>
+                          </a:solidFill>
+                          <a:latin typeface="Calibri" pitchFamily="34" charset="0"/>
+                          <a:ea typeface="Calibri" pitchFamily="34" charset="-122"/>
+                          <a:cs typeface="Calibri" pitchFamily="34" charset="-120"/>
+                        </a:rPr>
+                        <a:t>— (limits the claim: ~88% of the gain is layout + protocol; cards add coverage, de-dup, auditability)</a:t>
+                      </a:r>
+                      <a:endParaRPr lang="en-US" sz="1000" dirty="0">
+                        <a:latin typeface="Calibri" charset="0"/>
+                        <a:ea typeface="Calibri" charset="0"/>
+                        <a:cs typeface="Calibri" charset="0"/>
+                      </a:endParaRPr>
+                    </a:p>
+                  </a:txBody>
+                  <a:tcPr marL="36576" marR="36576" marT="36576" marB="36576" anchor="ctr">
+                    <a:lnL w="6350" cap="flat" cmpd="sng" algn="ctr">
+                      <a:solidFill>
+                        <a:srgbClr val="D1D5DB"/>
+                      </a:solidFill>
+                      <a:prstDash val="solid"/>
+                      <a:round/>
+                      <a:headEnd type="none" w="med" len="med"/>
+                      <a:tailEnd type="none" w="med" len="med"/>
+                    </a:lnL>
+                    <a:lnR w="6350" cap="flat" cmpd="sng" algn="ctr">
+                      <a:solidFill>
+                        <a:srgbClr val="D1D5DB"/>
+                      </a:solidFill>
+                      <a:prstDash val="solid"/>
+                      <a:round/>
+                      <a:headEnd type="none" w="med" len="med"/>
+                      <a:tailEnd type="none" w="med" len="med"/>
+                    </a:lnR>
+                    <a:lnT w="6350" cap="flat" cmpd="sng" algn="ctr">
+                      <a:solidFill>
+                        <a:srgbClr val="D1D5DB"/>
+                      </a:solidFill>
+                      <a:prstDash val="solid"/>
+                      <a:round/>
+                      <a:headEnd type="none" w="med" len="med"/>
+                      <a:tailEnd type="none" w="med" len="med"/>
+                    </a:lnT>
+                    <a:lnB w="6350" cap="flat" cmpd="sng" algn="ctr">
+                      <a:solidFill>
+                        <a:srgbClr val="D1D5DB"/>
+                      </a:solidFill>
+                      <a:prstDash val="solid"/>
+                      <a:round/>
+                      <a:headEnd type="none" w="med" len="med"/>
+                      <a:tailEnd type="none" w="med" len="med"/>
+                    </a:lnB>
+                    <a:solidFill>
+                      <a:srgbClr val="F5F7FA"/>
                     </a:solidFill>
                   </a:tcPr>
                 </a:tc>
@@ -8118,7 +8324,7 @@
                           <a:ea typeface="Calibri" pitchFamily="34" charset="-122"/>
                           <a:cs typeface="Calibri" pitchFamily="34" charset="-120"/>
                         </a:rPr>
-                        <a:t>54.9 (142K tok; n = 82, 18% capped)</a:t>
+                        <a:t>65.8 (142K tok; 120 q, capped rows rerun at 8000)</a:t>
                       </a:r>
                       <a:endParaRPr lang="en-US" sz="950" dirty="0">
                         <a:latin typeface="Calibri" charset="0"/>
@@ -8322,7 +8528,7 @@
                           <a:ea typeface="Calibri" pitchFamily="34" charset="-122"/>
                           <a:cs typeface="Calibri" pitchFamily="34" charset="-120"/>
                         </a:rPr>
-                        <a:t>+17.1 on the same 82 q, p = 0.024; projection costs 1/9</a:t>
+                        <a:t>+8.4 vs full context, per-question p = 0.02–0.19, store-level CI crosses zero; projection costs 1/9</a:t>
                       </a:r>
                       <a:endParaRPr lang="en-US" sz="950" dirty="0">
                         <a:latin typeface="Calibri" charset="0"/>
@@ -8415,7 +8621,7 @@
                 <a:ea typeface="Calibri" pitchFamily="34" charset="-122"/>
                 <a:cs typeface="Calibri" pitchFamily="34" charset="-120"/>
               </a:rPr>
-              <a:t>Five readers on the same 140 questions: the ledger beats top-10 retrieval by ≥ 15 pp for every reader; against full context it wins for haiku (+23.6) and a local qwen3:14b (+17.9), ties for Gemini 3.6 Flash (−0.7) and loses for gpt-5-mini (−7.1). The stronger the reader on full context, the smaller the ledger's edge.</a:t>
+              <a:t>Five readers on the same 140 questions: the ledger beats top-10 retrieval by ≥ 15 pp for every reader; against full context it wins for haiku (+23.6) and a local qwen3:14b (+17.9), ties for Gemini 3.6 Flash (−0.7) and for gpt-5-mini after fixing its output cap (−4.3, n.s.). The stronger the reader on full context, the smaller the ledger's edge. Full text + protocol on Sonnet 5: 96.4 = plain full text 97.1 = ledger 95.0.</a:t>
             </a:r>
             <a:endParaRPr lang="en-US" sz="1050" dirty="0"/>
           </a:p>
@@ -8436,7 +8642,7 @@
                 <a:ea typeface="Calibri" pitchFamily="34" charset="-122"/>
                 <a:cs typeface="Calibri" pitchFamily="34" charset="-120"/>
               </a:rPr>
-              <a:t>Write side: Sonnet-built cards give 133/133 gold rows but 92.9 / 92.1; the assertion-type filter lifts to 93.6 / 95.0; a second extraction pass reaches 140/140 gold rows. Extraction is nondeterministic (two passes overlap 2–33% of cards) and 140-q reader runs jitter 3–4 pp.</a:t>
+              <a:t>Write side: Sonnet-built cards give 133/133 gold rows but 92.9 / 92.1; the assertion-type filter lifts to 93.6 / 95.0; a second extraction pass reaches 140/140 gold rows. Extraction is nondeterministic (two passes overlap 2–33% of cards) and repeat runs of six arms show run-to-run sd ≤ 1.6 pp (batch 46c).</a:t>
             </a:r>
             <a:endParaRPr lang="en-US" sz="1050" dirty="0"/>
           </a:p>
@@ -9853,7 +10059,7 @@
                           <a:ea typeface="Calibri" pitchFamily="34" charset="-122"/>
                           <a:cs typeface="Calibri" pitchFamily="34" charset="-120"/>
                         </a:rPr>
-                        <a:t>—</a:t>
+                        <a:t>96.4</a:t>
                       </a:r>
                       <a:endParaRPr lang="en-US" sz="950" dirty="0">
                         <a:latin typeface="Calibri" charset="0"/>
@@ -9921,7 +10127,7 @@
                           <a:ea typeface="Calibri" pitchFamily="34" charset="-122"/>
                           <a:cs typeface="Calibri" pitchFamily="34" charset="-120"/>
                         </a:rPr>
-                        <a:t>13.8K</a:t>
+                        <a:t>13.8K / 18.6K</a:t>
                       </a:r>
                       <a:endParaRPr lang="en-US" sz="950" dirty="0">
                         <a:latin typeface="Calibri" charset="0"/>
@@ -9989,7 +10195,7 @@
                           <a:ea typeface="Calibri" pitchFamily="34" charset="-122"/>
                           <a:cs typeface="Calibri" pitchFamily="34" charset="-120"/>
                         </a:rPr>
-                        <a:t>—</a:t>
+                        <a:t>$0.041</a:t>
                       </a:r>
                       <a:endParaRPr lang="en-US" sz="950" dirty="0">
                         <a:latin typeface="Calibri" charset="0"/>
@@ -11834,7 +12040,7 @@
                 <a:ea typeface="Calibri" pitchFamily="34" charset="-122"/>
                 <a:cs typeface="Calibri" pitchFamily="34" charset="-120"/>
               </a:rPr>
-              <a:t>Using top-10 retrieval as the only baseline inflates any memory mechanism by 19–37 pp; the +42 headline is reported next to +21 (weak reader) and −2 (strong reader), never alone. With the ledger at 140/140 gold rows reader scores still move 3–4 pp between runs.</a:t>
+              <a:t>Using top-10 retrieval as the only baseline inflates any memory mechanism by 19–37 pp; the +42 headline is reported next to +21 (weak reader) and −2 (strong reader), never alone. Run-to-run sd across six arms is ≤ 1.6 pp (batch 46c), so differences under ~3 pp are not claimed.</a:t>
             </a:r>
             <a:endParaRPr lang="en-US" sz="1050" dirty="0"/>
           </a:p>
@@ -36729,7 +36935,7 @@
                 <a:ea typeface="Calibri" pitchFamily="34" charset="-122"/>
                 <a:cs typeface="Calibri" pitchFamily="34" charset="-120"/>
               </a:rPr>
-              <a:t>On total score the trajectory protocol on raw text nearly matches the ledger (86.6 vs 89.3); the ledger's distinct value is in counting questions, token cost, order robustness and scale — a render-matched control is the next check.</a:t>
+              <a:t>Render-matched controls show ~88% of the ledger's gain over plain full text is layout + trajectory protocol (cards-only 85.0, raw quotes 85.4, ledger 89.3 on 14K; cards-only 70.0 vs projection 61.7 vs raw quotes 55.8 on 104K). Write-time cards earn their place through coverage without retrieval, de-duplication and auditability, not most of the accuracy.</a:t>
             </a:r>
             <a:endParaRPr lang="en-US" sz="1150" dirty="0"/>
           </a:p>
@@ -36771,7 +36977,7 @@
                 <a:ea typeface="Calibri" pitchFamily="34" charset="-122"/>
                 <a:cs typeface="Calibri" pitchFamily="34" charset="-120"/>
               </a:rPr>
-              <a:t>Synthetic dialogue; assistant turns stored truncated; human agreement fair (α 0.45 / 0.30); the v2.5 human review is in progress; write-side extraction is nondeterministic and 140-q runs jitter 3–4 pp.</a:t>
+              <a:t>Synthetic dialogue; assistant turns stored truncated; human agreement fair (α 0.45 / 0.30); the v2.5 human review is in progress; write-side extraction is nondeterministic (two passes overlap 2–33%); reader run-to-run sd ≤ 1.6 pp; the 104K strong-reader advantage of the projection is per-question significant but not at store level.</a:t>
             </a:r>
             <a:endParaRPr lang="en-US" sz="1150" dirty="0"/>
           </a:p>
@@ -36874,7 +37080,7 @@
                 <a:ea typeface="Calibri" pitchFamily="34" charset="-122"/>
                 <a:cs typeface="Calibri" pitchFamily="34" charset="-120"/>
               </a:rPr>
-              <a:t>Render-matched control (layout kept, compile off) to separate layout from mechanism; finish the 104K full-context arm so the store-level CI closes.</a:t>
+              <a:t>Card builder schema regression fixed (batch 46e: root cause was a default flag since Aug 13; the new builder back-fills slot_class / owner, regression test 3/3); retire the derived store in the next full build.</a:t>
             </a:r>
             <a:endParaRPr lang="en-US" sz="1150" dirty="0"/>
           </a:p>
@@ -36895,7 +37101,7 @@
                 <a:ea typeface="Calibri" pitchFamily="34" charset="-122"/>
                 <a:cs typeface="Calibri" pitchFamily="34" charset="-120"/>
               </a:rPr>
-              <a:t>Freeze the write-side configuration (Sonnet extractor + assertion-type filter + second pass), build the full 144-chain store, and run the 560 questions twice.</a:t>
+              <a:t>Frozen write-side configuration (Sonnet extractor + assertion-type filter + gold-free second pass) on all 144 chains, 560 questions run twice, paired against the haiku store (batch 46d, running); then more 104K stores so the strong-reader store-level CI closes.</a:t>
             </a:r>
             <a:endParaRPr lang="en-US" sz="1150" dirty="0"/>
           </a:p>
@@ -44136,7 +44342,7 @@
                 <a:ea typeface="Calibri" pitchFamily="34" charset="-122"/>
                 <a:cs typeface="Calibri" pitchFamily="34" charset="-120"/>
               </a:rPr>
-              <a:t>Five readers on the same 140 q: the ledger beats top-10 retrieval by ≥ 15 pp for all; against the whole memory in the prompt it wins for haiku (+23.6) and a local 14B model (+17.9), ties for Gemini (−0.7) and loses for gpt-5-mini (−7.1).</a:t>
+              <a:t>Five readers on the same 140 q: the ledger beats top-10 retrieval by ≥ 15 pp for all; against the whole memory in the prompt it wins for haiku (+23.6) and a local 14B model (+17.9), ties for Gemini (−0.7) and roughly ties for gpt-5-mini (−4.3, n.s., after fixing its output cap).</a:t>
             </a:r>
             <a:endParaRPr lang="en-US" sz="1050" dirty="0"/>
           </a:p>
@@ -44260,7 +44466,7 @@
                 <a:ea typeface="Calibri" pitchFamily="34" charset="-122"/>
                 <a:cs typeface="Calibri" pitchFamily="34" charset="-120"/>
               </a:rPr>
-              <a:t>Caveat: Presentation, Not Mechanism (2607.16019) — layout can carry much of a ledger-style gain; a render-matched control is the next check.</a:t>
+              <a:t>Render-matched control (batches 44 / 46b): same layout + protocol with compile off scores 85.0 (14K) / 70.0 (104K); keyword-matched raw quotes in the same layout 85.4 / 55.8; ledger 89.3 / projection 61.7. About 88% of the ledger’s gain over plain full text is layout + protocol; write-time cards add coverage, de-duplication (raw quotes double-count repeated mentions at 104K) and auditability, not most of the accuracy.</a:t>
             </a:r>
             <a:endParaRPr lang="en-US" sz="1050" dirty="0"/>
           </a:p>

--- a/results/talk_qvf_wikistate_20260904.pptx
+++ b/results/talk_qvf_wikistate_20260904.pptx
@@ -8642,7 +8642,7 @@
                 <a:ea typeface="Calibri" pitchFamily="34" charset="-122"/>
                 <a:cs typeface="Calibri" pitchFamily="34" charset="-120"/>
               </a:rPr>
-              <a:t>Write side: Sonnet-built cards give 133/133 gold rows but 92.9 / 92.1; the assertion-type filter lifts to 93.6 / 95.0; a second extraction pass reaches 140/140 gold rows. Extraction is nondeterministic (two passes overlap 2–33% of cards) and repeat runs of six arms show run-to-run sd ≤ 1.6 pp (batch 46c).</a:t>
+              <a:t>Write side: Sonnet-built cards give 133/133 gold rows but 92.9 / 92.1; the assertion-type filter lifts to 93.6 / 95.0; a second extraction pass reaches 140/140 gold rows. Scaled to all 144 chains (batch 46d) the frozen configuration cuts missing gold rows 71 → 14 and lifts the compiled ceiling 85.9 → 92.5, yet the haiku reader scores 89.8 / 90.2 vs 89.3 on the haiku-built store (p = 0.80): ledger content is not this reader's bottleneck. Extraction is nondeterministic (two passes overlap 2–33% of cards) and repeat runs of six arms show run-to-run sd ≤ 1.6 pp (batch 46c).</a:t>
             </a:r>
             <a:endParaRPr lang="en-US" sz="1050" dirty="0"/>
           </a:p>
@@ -17086,7 +17086,7 @@
                 <a:gridCol w="1280160"/>
                 <a:gridCol w="1554480"/>
               </a:tblGrid>
-              <a:tr h="365760">
+              <a:tr h="338328">
                 <a:tc>
                   <a:txBody>
                     <a:bodyPr/>
@@ -17096,7 +17096,7 @@
                         <a:buNone/>
                       </a:pPr>
                       <a:r>
-                        <a:rPr lang="en-US" sz="1100" b="1" dirty="0">
+                        <a:rPr lang="en-US" sz="1050" b="1" dirty="0">
                           <a:solidFill>
                             <a:srgbClr val="FFFFFF"/>
                           </a:solidFill>
@@ -17106,7 +17106,7 @@
                         </a:rPr>
                         <a:t>Arm</a:t>
                       </a:r>
-                      <a:endParaRPr lang="en-US" sz="1100" dirty="0">
+                      <a:endParaRPr lang="en-US" sz="1050" dirty="0">
                         <a:latin typeface="Calibri" charset="0"/>
                         <a:ea typeface="Calibri" charset="0"/>
                         <a:cs typeface="Calibri" charset="0"/>
@@ -17164,7 +17164,7 @@
                         <a:buNone/>
                       </a:pPr>
                       <a:r>
-                        <a:rPr lang="en-US" sz="1100" b="1" dirty="0">
+                        <a:rPr lang="en-US" sz="1050" b="1" dirty="0">
                           <a:solidFill>
                             <a:srgbClr val="FFFFFF"/>
                           </a:solidFill>
@@ -17174,7 +17174,7 @@
                         </a:rPr>
                         <a:t>Accuracy</a:t>
                       </a:r>
-                      <a:endParaRPr lang="en-US" sz="1100" dirty="0">
+                      <a:endParaRPr lang="en-US" sz="1050" dirty="0">
                         <a:latin typeface="Calibri" charset="0"/>
                         <a:ea typeface="Calibri" charset="0"/>
                         <a:cs typeface="Calibri" charset="0"/>
@@ -17232,7 +17232,7 @@
                         <a:buNone/>
                       </a:pPr>
                       <a:r>
-                        <a:rPr lang="en-US" sz="1100" b="1" dirty="0">
+                        <a:rPr lang="en-US" sz="1050" b="1" dirty="0">
                           <a:solidFill>
                             <a:srgbClr val="FFFFFF"/>
                           </a:solidFill>
@@ -17242,7 +17242,7 @@
                         </a:rPr>
                         <a:t>Δ vs direct</a:t>
                       </a:r>
-                      <a:endParaRPr lang="en-US" sz="1100" dirty="0">
+                      <a:endParaRPr lang="en-US" sz="1050" dirty="0">
                         <a:latin typeface="Calibri" charset="0"/>
                         <a:ea typeface="Calibri" charset="0"/>
                         <a:cs typeface="Calibri" charset="0"/>
@@ -17300,7 +17300,7 @@
                         <a:buNone/>
                       </a:pPr>
                       <a:r>
-                        <a:rPr lang="en-US" sz="1100" b="1" dirty="0">
+                        <a:rPr lang="en-US" sz="1050" b="1" dirty="0">
                           <a:solidFill>
                             <a:srgbClr val="FFFFFF"/>
                           </a:solidFill>
@@ -17310,7 +17310,7 @@
                         </a:rPr>
                         <a:t>In tok / q</a:t>
                       </a:r>
-                      <a:endParaRPr lang="en-US" sz="1100" dirty="0">
+                      <a:endParaRPr lang="en-US" sz="1050" dirty="0">
                         <a:latin typeface="Calibri" charset="0"/>
                         <a:ea typeface="Calibri" charset="0"/>
                         <a:cs typeface="Calibri" charset="0"/>
@@ -17368,7 +17368,7 @@
                         <a:buNone/>
                       </a:pPr>
                       <a:r>
-                        <a:rPr lang="en-US" sz="1100" b="1" dirty="0">
+                        <a:rPr lang="en-US" sz="1050" b="1" dirty="0">
                           <a:solidFill>
                             <a:srgbClr val="FFFFFF"/>
                           </a:solidFill>
@@ -17378,7 +17378,7 @@
                         </a:rPr>
                         <a:t>Out tok / q</a:t>
                       </a:r>
-                      <a:endParaRPr lang="en-US" sz="1100" dirty="0">
+                      <a:endParaRPr lang="en-US" sz="1050" dirty="0">
                         <a:latin typeface="Calibri" charset="0"/>
                         <a:ea typeface="Calibri" charset="0"/>
                         <a:cs typeface="Calibri" charset="0"/>
@@ -17436,7 +17436,7 @@
                         <a:buNone/>
                       </a:pPr>
                       <a:r>
-                        <a:rPr lang="en-US" sz="1100" b="1" dirty="0">
+                        <a:rPr lang="en-US" sz="1050" b="1" dirty="0">
                           <a:solidFill>
                             <a:srgbClr val="FFFFFF"/>
                           </a:solidFill>
@@ -17446,7 +17446,7 @@
                         </a:rPr>
                         <a:t>$ / q</a:t>
                       </a:r>
-                      <a:endParaRPr lang="en-US" sz="1100" dirty="0">
+                      <a:endParaRPr lang="en-US" sz="1050" dirty="0">
                         <a:latin typeface="Calibri" charset="0"/>
                         <a:ea typeface="Calibri" charset="0"/>
                         <a:cs typeface="Calibri" charset="0"/>
@@ -17504,7 +17504,7 @@
                         <a:buNone/>
                       </a:pPr>
                       <a:r>
-                        <a:rPr lang="en-US" sz="1100" b="1" dirty="0">
+                        <a:rPr lang="en-US" sz="1050" b="1" dirty="0">
                           <a:solidFill>
                             <a:srgbClr val="FFFFFF"/>
                           </a:solidFill>
@@ -17514,7 +17514,7 @@
                         </a:rPr>
                         <a:t>Median latency</a:t>
                       </a:r>
-                      <a:endParaRPr lang="en-US" sz="1100" dirty="0">
+                      <a:endParaRPr lang="en-US" sz="1050" dirty="0">
                         <a:latin typeface="Calibri" charset="0"/>
                         <a:ea typeface="Calibri" charset="0"/>
                         <a:cs typeface="Calibri" charset="0"/>
@@ -17564,7 +17564,7 @@
                   </a:tcPr>
                 </a:tc>
               </a:tr>
-              <a:tr h="365760">
+              <a:tr h="338328">
                 <a:tc>
                   <a:txBody>
                     <a:bodyPr/>
@@ -17574,7 +17574,7 @@
                         <a:buNone/>
                       </a:pPr>
                       <a:r>
-                        <a:rPr lang="en-US" sz="1100" dirty="0">
+                        <a:rPr lang="en-US" sz="1050" dirty="0">
                           <a:solidFill>
                             <a:srgbClr val="1F2937"/>
                           </a:solidFill>
@@ -17584,7 +17584,7 @@
                         </a:rPr>
                         <a:t>Direct read (top-10 retrieval)</a:t>
                       </a:r>
-                      <a:endParaRPr lang="en-US" sz="1100" dirty="0">
+                      <a:endParaRPr lang="en-US" sz="1050" dirty="0">
                         <a:latin typeface="Calibri" charset="0"/>
                         <a:ea typeface="Calibri" charset="0"/>
                         <a:cs typeface="Calibri" charset="0"/>
@@ -17642,7 +17642,7 @@
                         <a:buNone/>
                       </a:pPr>
                       <a:r>
-                        <a:rPr lang="en-US" sz="1100" dirty="0">
+                        <a:rPr lang="en-US" sz="1050" dirty="0">
                           <a:solidFill>
                             <a:srgbClr val="1F2937"/>
                           </a:solidFill>
@@ -17652,7 +17652,7 @@
                         </a:rPr>
                         <a:t>47.32</a:t>
                       </a:r>
-                      <a:endParaRPr lang="en-US" sz="1100" dirty="0">
+                      <a:endParaRPr lang="en-US" sz="1050" dirty="0">
                         <a:latin typeface="Calibri" charset="0"/>
                         <a:ea typeface="Calibri" charset="0"/>
                         <a:cs typeface="Calibri" charset="0"/>
@@ -17710,7 +17710,7 @@
                         <a:buNone/>
                       </a:pPr>
                       <a:r>
-                        <a:rPr lang="en-US" sz="1100" dirty="0">
+                        <a:rPr lang="en-US" sz="1050" dirty="0">
                           <a:solidFill>
                             <a:srgbClr val="1F2937"/>
                           </a:solidFill>
@@ -17720,7 +17720,7 @@
                         </a:rPr>
                         <a:t>—</a:t>
                       </a:r>
-                      <a:endParaRPr lang="en-US" sz="1100" dirty="0">
+                      <a:endParaRPr lang="en-US" sz="1050" dirty="0">
                         <a:latin typeface="Calibri" charset="0"/>
                         <a:ea typeface="Calibri" charset="0"/>
                         <a:cs typeface="Calibri" charset="0"/>
@@ -17778,7 +17778,7 @@
                         <a:buNone/>
                       </a:pPr>
                       <a:r>
-                        <a:rPr lang="en-US" sz="1100" dirty="0">
+                        <a:rPr lang="en-US" sz="1050" dirty="0">
                           <a:solidFill>
                             <a:srgbClr val="1F2937"/>
                           </a:solidFill>
@@ -17788,7 +17788,7 @@
                         </a:rPr>
                         <a:t>878</a:t>
                       </a:r>
-                      <a:endParaRPr lang="en-US" sz="1100" dirty="0">
+                      <a:endParaRPr lang="en-US" sz="1050" dirty="0">
                         <a:latin typeface="Calibri" charset="0"/>
                         <a:ea typeface="Calibri" charset="0"/>
                         <a:cs typeface="Calibri" charset="0"/>
@@ -17846,7 +17846,7 @@
                         <a:buNone/>
                       </a:pPr>
                       <a:r>
-                        <a:rPr lang="en-US" sz="1100" dirty="0">
+                        <a:rPr lang="en-US" sz="1050" dirty="0">
                           <a:solidFill>
                             <a:srgbClr val="1F2937"/>
                           </a:solidFill>
@@ -17856,7 +17856,7 @@
                         </a:rPr>
                         <a:t>86</a:t>
                       </a:r>
-                      <a:endParaRPr lang="en-US" sz="1100" dirty="0">
+                      <a:endParaRPr lang="en-US" sz="1050" dirty="0">
                         <a:latin typeface="Calibri" charset="0"/>
                         <a:ea typeface="Calibri" charset="0"/>
                         <a:cs typeface="Calibri" charset="0"/>
@@ -17914,7 +17914,7 @@
                         <a:buNone/>
                       </a:pPr>
                       <a:r>
-                        <a:rPr lang="en-US" sz="1100" dirty="0">
+                        <a:rPr lang="en-US" sz="1050" dirty="0">
                           <a:solidFill>
                             <a:srgbClr val="1F2937"/>
                           </a:solidFill>
@@ -17924,7 +17924,7 @@
                         </a:rPr>
                         <a:t>$0.00131</a:t>
                       </a:r>
-                      <a:endParaRPr lang="en-US" sz="1100" dirty="0">
+                      <a:endParaRPr lang="en-US" sz="1050" dirty="0">
                         <a:latin typeface="Calibri" charset="0"/>
                         <a:ea typeface="Calibri" charset="0"/>
                         <a:cs typeface="Calibri" charset="0"/>
@@ -17982,7 +17982,7 @@
                         <a:buNone/>
                       </a:pPr>
                       <a:r>
-                        <a:rPr lang="en-US" sz="1100" dirty="0">
+                        <a:rPr lang="en-US" sz="1050" dirty="0">
                           <a:solidFill>
                             <a:srgbClr val="1F2937"/>
                           </a:solidFill>
@@ -17992,7 +17992,7 @@
                         </a:rPr>
                         <a:t>1.55 s</a:t>
                       </a:r>
-                      <a:endParaRPr lang="en-US" sz="1100" dirty="0">
+                      <a:endParaRPr lang="en-US" sz="1050" dirty="0">
                         <a:latin typeface="Calibri" charset="0"/>
                         <a:ea typeface="Calibri" charset="0"/>
                         <a:cs typeface="Calibri" charset="0"/>
@@ -18042,7 +18042,7 @@
                   </a:tcPr>
                 </a:tc>
               </a:tr>
-              <a:tr h="365760">
+              <a:tr h="338328">
                 <a:tc>
                   <a:txBody>
                     <a:bodyPr/>
@@ -18052,7 +18052,7 @@
                         <a:buNone/>
                       </a:pPr>
                       <a:r>
-                        <a:rPr lang="en-US" sz="1100" dirty="0">
+                        <a:rPr lang="en-US" sz="1050" dirty="0">
                           <a:solidFill>
                             <a:srgbClr val="1F2937"/>
                           </a:solidFill>
@@ -18062,7 +18062,7 @@
                         </a:rPr>
                         <a:t>1 Select</a:t>
                       </a:r>
-                      <a:endParaRPr lang="en-US" sz="1100" dirty="0">
+                      <a:endParaRPr lang="en-US" sz="1050" dirty="0">
                         <a:latin typeface="Calibri" charset="0"/>
                         <a:ea typeface="Calibri" charset="0"/>
                         <a:cs typeface="Calibri" charset="0"/>
@@ -18120,7 +18120,7 @@
                         <a:buNone/>
                       </a:pPr>
                       <a:r>
-                        <a:rPr lang="en-US" sz="1100" dirty="0">
+                        <a:rPr lang="en-US" sz="1050" dirty="0">
                           <a:solidFill>
                             <a:srgbClr val="1F2937"/>
                           </a:solidFill>
@@ -18130,7 +18130,7 @@
                         </a:rPr>
                         <a:t>66.25</a:t>
                       </a:r>
-                      <a:endParaRPr lang="en-US" sz="1100" dirty="0">
+                      <a:endParaRPr lang="en-US" sz="1050" dirty="0">
                         <a:latin typeface="Calibri" charset="0"/>
                         <a:ea typeface="Calibri" charset="0"/>
                         <a:cs typeface="Calibri" charset="0"/>
@@ -18188,7 +18188,7 @@
                         <a:buNone/>
                       </a:pPr>
                       <a:r>
-                        <a:rPr lang="en-US" sz="1100" dirty="0">
+                        <a:rPr lang="en-US" sz="1050" dirty="0">
                           <a:solidFill>
                             <a:srgbClr val="1F2937"/>
                           </a:solidFill>
@@ -18198,7 +18198,7 @@
                         </a:rPr>
                         <a:t>+18.9</a:t>
                       </a:r>
-                      <a:endParaRPr lang="en-US" sz="1100" dirty="0">
+                      <a:endParaRPr lang="en-US" sz="1050" dirty="0">
                         <a:latin typeface="Calibri" charset="0"/>
                         <a:ea typeface="Calibri" charset="0"/>
                         <a:cs typeface="Calibri" charset="0"/>
@@ -18256,7 +18256,7 @@
                         <a:buNone/>
                       </a:pPr>
                       <a:r>
-                        <a:rPr lang="en-US" sz="1100" dirty="0">
+                        <a:rPr lang="en-US" sz="1050" dirty="0">
                           <a:solidFill>
                             <a:srgbClr val="1F2937"/>
                           </a:solidFill>
@@ -18266,7 +18266,7 @@
                         </a:rPr>
                         <a:t>2,169</a:t>
                       </a:r>
-                      <a:endParaRPr lang="en-US" sz="1100" dirty="0">
+                      <a:endParaRPr lang="en-US" sz="1050" dirty="0">
                         <a:latin typeface="Calibri" charset="0"/>
                         <a:ea typeface="Calibri" charset="0"/>
                         <a:cs typeface="Calibri" charset="0"/>
@@ -18324,7 +18324,7 @@
                         <a:buNone/>
                       </a:pPr>
                       <a:r>
-                        <a:rPr lang="en-US" sz="1100" dirty="0">
+                        <a:rPr lang="en-US" sz="1050" dirty="0">
                           <a:solidFill>
                             <a:srgbClr val="1F2937"/>
                           </a:solidFill>
@@ -18334,7 +18334,7 @@
                         </a:rPr>
                         <a:t>108</a:t>
                       </a:r>
-                      <a:endParaRPr lang="en-US" sz="1100" dirty="0">
+                      <a:endParaRPr lang="en-US" sz="1050" dirty="0">
                         <a:latin typeface="Calibri" charset="0"/>
                         <a:ea typeface="Calibri" charset="0"/>
                         <a:cs typeface="Calibri" charset="0"/>
@@ -18392,7 +18392,7 @@
                         <a:buNone/>
                       </a:pPr>
                       <a:r>
-                        <a:rPr lang="en-US" sz="1100" dirty="0">
+                        <a:rPr lang="en-US" sz="1050" dirty="0">
                           <a:solidFill>
                             <a:srgbClr val="1F2937"/>
                           </a:solidFill>
@@ -18402,7 +18402,7 @@
                         </a:rPr>
                         <a:t>$0.00271</a:t>
                       </a:r>
-                      <a:endParaRPr lang="en-US" sz="1100" dirty="0">
+                      <a:endParaRPr lang="en-US" sz="1050" dirty="0">
                         <a:latin typeface="Calibri" charset="0"/>
                         <a:ea typeface="Calibri" charset="0"/>
                         <a:cs typeface="Calibri" charset="0"/>
@@ -18460,7 +18460,7 @@
                         <a:buNone/>
                       </a:pPr>
                       <a:r>
-                        <a:rPr lang="en-US" sz="1100" dirty="0">
+                        <a:rPr lang="en-US" sz="1050" dirty="0">
                           <a:solidFill>
                             <a:srgbClr val="1F2937"/>
                           </a:solidFill>
@@ -18470,7 +18470,7 @@
                         </a:rPr>
                         <a:t>5.50 s</a:t>
                       </a:r>
-                      <a:endParaRPr lang="en-US" sz="1100" dirty="0">
+                      <a:endParaRPr lang="en-US" sz="1050" dirty="0">
                         <a:latin typeface="Calibri" charset="0"/>
                         <a:ea typeface="Calibri" charset="0"/>
                         <a:cs typeface="Calibri" charset="0"/>
@@ -18520,7 +18520,7 @@
                   </a:tcPr>
                 </a:tc>
               </a:tr>
-              <a:tr h="365760">
+              <a:tr h="338328">
                 <a:tc>
                   <a:txBody>
                     <a:bodyPr/>
@@ -18530,7 +18530,7 @@
                         <a:buNone/>
                       </a:pPr>
                       <a:r>
-                        <a:rPr lang="en-US" sz="1100" dirty="0">
+                        <a:rPr lang="en-US" sz="1050" dirty="0">
                           <a:solidFill>
                             <a:srgbClr val="1F2937"/>
                           </a:solidFill>
@@ -18540,7 +18540,7 @@
                         </a:rPr>
                         <a:t>2 Certify</a:t>
                       </a:r>
-                      <a:endParaRPr lang="en-US" sz="1100" dirty="0">
+                      <a:endParaRPr lang="en-US" sz="1050" dirty="0">
                         <a:latin typeface="Calibri" charset="0"/>
                         <a:ea typeface="Calibri" charset="0"/>
                         <a:cs typeface="Calibri" charset="0"/>
@@ -18598,7 +18598,7 @@
                         <a:buNone/>
                       </a:pPr>
                       <a:r>
-                        <a:rPr lang="en-US" sz="1100" dirty="0">
+                        <a:rPr lang="en-US" sz="1050" dirty="0">
                           <a:solidFill>
                             <a:srgbClr val="1F2937"/>
                           </a:solidFill>
@@ -18608,7 +18608,7 @@
                         </a:rPr>
                         <a:t>66.79</a:t>
                       </a:r>
-                      <a:endParaRPr lang="en-US" sz="1100" dirty="0">
+                      <a:endParaRPr lang="en-US" sz="1050" dirty="0">
                         <a:latin typeface="Calibri" charset="0"/>
                         <a:ea typeface="Calibri" charset="0"/>
                         <a:cs typeface="Calibri" charset="0"/>
@@ -18666,7 +18666,7 @@
                         <a:buNone/>
                       </a:pPr>
                       <a:r>
-                        <a:rPr lang="en-US" sz="1100" dirty="0">
+                        <a:rPr lang="en-US" sz="1050" dirty="0">
                           <a:solidFill>
                             <a:srgbClr val="1F2937"/>
                           </a:solidFill>
@@ -18676,7 +18676,7 @@
                         </a:rPr>
                         <a:t>+19.5</a:t>
                       </a:r>
-                      <a:endParaRPr lang="en-US" sz="1100" dirty="0">
+                      <a:endParaRPr lang="en-US" sz="1050" dirty="0">
                         <a:latin typeface="Calibri" charset="0"/>
                         <a:ea typeface="Calibri" charset="0"/>
                         <a:cs typeface="Calibri" charset="0"/>
@@ -18734,7 +18734,7 @@
                         <a:buNone/>
                       </a:pPr>
                       <a:r>
-                        <a:rPr lang="en-US" sz="1100" dirty="0">
+                        <a:rPr lang="en-US" sz="1050" dirty="0">
                           <a:solidFill>
                             <a:srgbClr val="1F2937"/>
                           </a:solidFill>
@@ -18744,7 +18744,7 @@
                         </a:rPr>
                         <a:t>2,346</a:t>
                       </a:r>
-                      <a:endParaRPr lang="en-US" sz="1100" dirty="0">
+                      <a:endParaRPr lang="en-US" sz="1050" dirty="0">
                         <a:latin typeface="Calibri" charset="0"/>
                         <a:ea typeface="Calibri" charset="0"/>
                         <a:cs typeface="Calibri" charset="0"/>
@@ -18802,7 +18802,7 @@
                         <a:buNone/>
                       </a:pPr>
                       <a:r>
-                        <a:rPr lang="en-US" sz="1100" dirty="0">
+                        <a:rPr lang="en-US" sz="1050" dirty="0">
                           <a:solidFill>
                             <a:srgbClr val="1F2937"/>
                           </a:solidFill>
@@ -18812,7 +18812,7 @@
                         </a:rPr>
                         <a:t>112</a:t>
                       </a:r>
-                      <a:endParaRPr lang="en-US" sz="1100" dirty="0">
+                      <a:endParaRPr lang="en-US" sz="1050" dirty="0">
                         <a:latin typeface="Calibri" charset="0"/>
                         <a:ea typeface="Calibri" charset="0"/>
                         <a:cs typeface="Calibri" charset="0"/>
@@ -18870,7 +18870,7 @@
                         <a:buNone/>
                       </a:pPr>
                       <a:r>
-                        <a:rPr lang="en-US" sz="1100" dirty="0">
+                        <a:rPr lang="en-US" sz="1050" dirty="0">
                           <a:solidFill>
                             <a:srgbClr val="1F2937"/>
                           </a:solidFill>
@@ -18880,7 +18880,7 @@
                         </a:rPr>
                         <a:t>$0.00291</a:t>
                       </a:r>
-                      <a:endParaRPr lang="en-US" sz="1100" dirty="0">
+                      <a:endParaRPr lang="en-US" sz="1050" dirty="0">
                         <a:latin typeface="Calibri" charset="0"/>
                         <a:ea typeface="Calibri" charset="0"/>
                         <a:cs typeface="Calibri" charset="0"/>
@@ -18938,7 +18938,7 @@
                         <a:buNone/>
                       </a:pPr>
                       <a:r>
-                        <a:rPr lang="en-US" sz="1100" dirty="0">
+                        <a:rPr lang="en-US" sz="1050" dirty="0">
                           <a:solidFill>
                             <a:srgbClr val="1F2937"/>
                           </a:solidFill>
@@ -18948,7 +18948,7 @@
                         </a:rPr>
                         <a:t>5.46 s</a:t>
                       </a:r>
-                      <a:endParaRPr lang="en-US" sz="1100" dirty="0">
+                      <a:endParaRPr lang="en-US" sz="1050" dirty="0">
                         <a:latin typeface="Calibri" charset="0"/>
                         <a:ea typeface="Calibri" charset="0"/>
                         <a:cs typeface="Calibri" charset="0"/>
@@ -18998,7 +18998,7 @@
                   </a:tcPr>
                 </a:tc>
               </a:tr>
-              <a:tr h="365760">
+              <a:tr h="338328">
                 <a:tc>
                   <a:txBody>
                     <a:bodyPr/>
@@ -19008,7 +19008,7 @@
                         <a:buNone/>
                       </a:pPr>
                       <a:r>
-                        <a:rPr lang="en-US" sz="1100" dirty="0">
+                        <a:rPr lang="en-US" sz="1050" dirty="0">
                           <a:solidFill>
                             <a:srgbClr val="1F2937"/>
                           </a:solidFill>
@@ -19018,7 +19018,7 @@
                         </a:rPr>
                         <a:t>3 Compile</a:t>
                       </a:r>
-                      <a:endParaRPr lang="en-US" sz="1100" dirty="0">
+                      <a:endParaRPr lang="en-US" sz="1050" dirty="0">
                         <a:latin typeface="Calibri" charset="0"/>
                         <a:ea typeface="Calibri" charset="0"/>
                         <a:cs typeface="Calibri" charset="0"/>
@@ -19076,7 +19076,7 @@
                         <a:buNone/>
                       </a:pPr>
                       <a:r>
-                        <a:rPr lang="en-US" sz="1100" dirty="0">
+                        <a:rPr lang="en-US" sz="1050" dirty="0">
                           <a:solidFill>
                             <a:srgbClr val="1F2937"/>
                           </a:solidFill>
@@ -19086,7 +19086,7 @@
                         </a:rPr>
                         <a:t>79.46</a:t>
                       </a:r>
-                      <a:endParaRPr lang="en-US" sz="1100" dirty="0">
+                      <a:endParaRPr lang="en-US" sz="1050" dirty="0">
                         <a:latin typeface="Calibri" charset="0"/>
                         <a:ea typeface="Calibri" charset="0"/>
                         <a:cs typeface="Calibri" charset="0"/>
@@ -19144,7 +19144,7 @@
                         <a:buNone/>
                       </a:pPr>
                       <a:r>
-                        <a:rPr lang="en-US" sz="1100" dirty="0">
+                        <a:rPr lang="en-US" sz="1050" dirty="0">
                           <a:solidFill>
                             <a:srgbClr val="1F2937"/>
                           </a:solidFill>
@@ -19154,7 +19154,7 @@
                         </a:rPr>
                         <a:t>+32.1</a:t>
                       </a:r>
-                      <a:endParaRPr lang="en-US" sz="1100" dirty="0">
+                      <a:endParaRPr lang="en-US" sz="1050" dirty="0">
                         <a:latin typeface="Calibri" charset="0"/>
                         <a:ea typeface="Calibri" charset="0"/>
                         <a:cs typeface="Calibri" charset="0"/>
@@ -19212,7 +19212,7 @@
                         <a:buNone/>
                       </a:pPr>
                       <a:r>
-                        <a:rPr lang="en-US" sz="1100" dirty="0">
+                        <a:rPr lang="en-US" sz="1050" dirty="0">
                           <a:solidFill>
                             <a:srgbClr val="1F2937"/>
                           </a:solidFill>
@@ -19222,7 +19222,7 @@
                         </a:rPr>
                         <a:t>2,268</a:t>
                       </a:r>
-                      <a:endParaRPr lang="en-US" sz="1100" dirty="0">
+                      <a:endParaRPr lang="en-US" sz="1050" dirty="0">
                         <a:latin typeface="Calibri" charset="0"/>
                         <a:ea typeface="Calibri" charset="0"/>
                         <a:cs typeface="Calibri" charset="0"/>
@@ -19280,7 +19280,7 @@
                         <a:buNone/>
                       </a:pPr>
                       <a:r>
-                        <a:rPr lang="en-US" sz="1100" dirty="0">
+                        <a:rPr lang="en-US" sz="1050" dirty="0">
                           <a:solidFill>
                             <a:srgbClr val="1F2937"/>
                           </a:solidFill>
@@ -19290,7 +19290,7 @@
                         </a:rPr>
                         <a:t>98</a:t>
                       </a:r>
-                      <a:endParaRPr lang="en-US" sz="1100" dirty="0">
+                      <a:endParaRPr lang="en-US" sz="1050" dirty="0">
                         <a:latin typeface="Calibri" charset="0"/>
                         <a:ea typeface="Calibri" charset="0"/>
                         <a:cs typeface="Calibri" charset="0"/>
@@ -19348,7 +19348,7 @@
                         <a:buNone/>
                       </a:pPr>
                       <a:r>
-                        <a:rPr lang="en-US" sz="1100" dirty="0">
+                        <a:rPr lang="en-US" sz="1050" dirty="0">
                           <a:solidFill>
                             <a:srgbClr val="1F2937"/>
                           </a:solidFill>
@@ -19358,7 +19358,7 @@
                         </a:rPr>
                         <a:t>$0.00276</a:t>
                       </a:r>
-                      <a:endParaRPr lang="en-US" sz="1100" dirty="0">
+                      <a:endParaRPr lang="en-US" sz="1050" dirty="0">
                         <a:latin typeface="Calibri" charset="0"/>
                         <a:ea typeface="Calibri" charset="0"/>
                         <a:cs typeface="Calibri" charset="0"/>
@@ -19416,7 +19416,7 @@
                         <a:buNone/>
                       </a:pPr>
                       <a:r>
-                        <a:rPr lang="en-US" sz="1100" dirty="0">
+                        <a:rPr lang="en-US" sz="1050" dirty="0">
                           <a:solidFill>
                             <a:srgbClr val="1F2937"/>
                           </a:solidFill>
@@ -19426,7 +19426,7 @@
                         </a:rPr>
                         <a:t>5.28 s</a:t>
                       </a:r>
-                      <a:endParaRPr lang="en-US" sz="1100" dirty="0">
+                      <a:endParaRPr lang="en-US" sz="1050" dirty="0">
                         <a:latin typeface="Calibri" charset="0"/>
                         <a:ea typeface="Calibri" charset="0"/>
                         <a:cs typeface="Calibri" charset="0"/>
@@ -19476,7 +19476,7 @@
                   </a:tcPr>
                 </a:tc>
               </a:tr>
-              <a:tr h="365760">
+              <a:tr h="338328">
                 <a:tc>
                   <a:txBody>
                     <a:bodyPr/>
@@ -19486,7 +19486,7 @@
                         <a:buNone/>
                       </a:pPr>
                       <a:r>
-                        <a:rPr lang="en-US" sz="1100" b="1" dirty="0">
+                        <a:rPr lang="en-US" sz="1050" b="1" dirty="0">
                           <a:solidFill>
                             <a:srgbClr val="1F2937"/>
                           </a:solidFill>
@@ -19496,7 +19496,7 @@
                         </a:rPr>
                         <a:t>4 Ledger + protocol (QVF)</a:t>
                       </a:r>
-                      <a:endParaRPr lang="en-US" sz="1100" dirty="0">
+                      <a:endParaRPr lang="en-US" sz="1050" dirty="0">
                         <a:latin typeface="Calibri" charset="0"/>
                         <a:ea typeface="Calibri" charset="0"/>
                         <a:cs typeface="Calibri" charset="0"/>
@@ -19554,7 +19554,7 @@
                         <a:buNone/>
                       </a:pPr>
                       <a:r>
-                        <a:rPr lang="en-US" sz="1100" b="1" dirty="0">
+                        <a:rPr lang="en-US" sz="1050" b="1" dirty="0">
                           <a:solidFill>
                             <a:srgbClr val="1F2937"/>
                           </a:solidFill>
@@ -19564,7 +19564,7 @@
                         </a:rPr>
                         <a:t>89.29</a:t>
                       </a:r>
-                      <a:endParaRPr lang="en-US" sz="1100" dirty="0">
+                      <a:endParaRPr lang="en-US" sz="1050" dirty="0">
                         <a:latin typeface="Calibri" charset="0"/>
                         <a:ea typeface="Calibri" charset="0"/>
                         <a:cs typeface="Calibri" charset="0"/>
@@ -19622,7 +19622,7 @@
                         <a:buNone/>
                       </a:pPr>
                       <a:r>
-                        <a:rPr lang="en-US" sz="1100" b="1" dirty="0">
+                        <a:rPr lang="en-US" sz="1050" b="1" dirty="0">
                           <a:solidFill>
                             <a:srgbClr val="1F2937"/>
                           </a:solidFill>
@@ -19632,7 +19632,7 @@
                         </a:rPr>
                         <a:t>+42.0</a:t>
                       </a:r>
-                      <a:endParaRPr lang="en-US" sz="1100" dirty="0">
+                      <a:endParaRPr lang="en-US" sz="1050" dirty="0">
                         <a:latin typeface="Calibri" charset="0"/>
                         <a:ea typeface="Calibri" charset="0"/>
                         <a:cs typeface="Calibri" charset="0"/>
@@ -19690,7 +19690,7 @@
                         <a:buNone/>
                       </a:pPr>
                       <a:r>
-                        <a:rPr lang="en-US" sz="1100" dirty="0">
+                        <a:rPr lang="en-US" sz="1050" dirty="0">
                           <a:solidFill>
                             <a:srgbClr val="1F2937"/>
                           </a:solidFill>
@@ -19700,7 +19700,7 @@
                         </a:rPr>
                         <a:t>2,937</a:t>
                       </a:r>
-                      <a:endParaRPr lang="en-US" sz="1100" dirty="0">
+                      <a:endParaRPr lang="en-US" sz="1050" dirty="0">
                         <a:latin typeface="Calibri" charset="0"/>
                         <a:ea typeface="Calibri" charset="0"/>
                         <a:cs typeface="Calibri" charset="0"/>
@@ -19758,7 +19758,7 @@
                         <a:buNone/>
                       </a:pPr>
                       <a:r>
-                        <a:rPr lang="en-US" sz="1100" dirty="0">
+                        <a:rPr lang="en-US" sz="1050" dirty="0">
                           <a:solidFill>
                             <a:srgbClr val="1F2937"/>
                           </a:solidFill>
@@ -19768,7 +19768,7 @@
                         </a:rPr>
                         <a:t>476</a:t>
                       </a:r>
-                      <a:endParaRPr lang="en-US" sz="1100" dirty="0">
+                      <a:endParaRPr lang="en-US" sz="1050" dirty="0">
                         <a:latin typeface="Calibri" charset="0"/>
                         <a:ea typeface="Calibri" charset="0"/>
                         <a:cs typeface="Calibri" charset="0"/>
@@ -19826,7 +19826,7 @@
                         <a:buNone/>
                       </a:pPr>
                       <a:r>
-                        <a:rPr lang="en-US" sz="1100" dirty="0">
+                        <a:rPr lang="en-US" sz="1050" dirty="0">
                           <a:solidFill>
                             <a:srgbClr val="1F2937"/>
                           </a:solidFill>
@@ -19836,7 +19836,7 @@
                         </a:rPr>
                         <a:t>$0.00532</a:t>
                       </a:r>
-                      <a:endParaRPr lang="en-US" sz="1100" dirty="0">
+                      <a:endParaRPr lang="en-US" sz="1050" dirty="0">
                         <a:latin typeface="Calibri" charset="0"/>
                         <a:ea typeface="Calibri" charset="0"/>
                         <a:cs typeface="Calibri" charset="0"/>
@@ -19894,7 +19894,7 @@
                         <a:buNone/>
                       </a:pPr>
                       <a:r>
-                        <a:rPr lang="en-US" sz="1100" dirty="0">
+                        <a:rPr lang="en-US" sz="1050" dirty="0">
                           <a:solidFill>
                             <a:srgbClr val="1F2937"/>
                           </a:solidFill>
@@ -19904,7 +19904,7 @@
                         </a:rPr>
                         <a:t>4.84 s</a:t>
                       </a:r>
-                      <a:endParaRPr lang="en-US" sz="1100" dirty="0">
+                      <a:endParaRPr lang="en-US" sz="1050" dirty="0">
                         <a:latin typeface="Calibri" charset="0"/>
                         <a:ea typeface="Calibri" charset="0"/>
                         <a:cs typeface="Calibri" charset="0"/>
@@ -19954,7 +19954,7 @@
                   </a:tcPr>
                 </a:tc>
               </a:tr>
-              <a:tr h="365760">
+              <a:tr h="338328">
                 <a:tc>
                   <a:txBody>
                     <a:bodyPr/>
@@ -19964,7 +19964,7 @@
                         <a:buNone/>
                       </a:pPr>
                       <a:r>
-                        <a:rPr lang="en-US" sz="1100" dirty="0">
+                        <a:rPr lang="en-US" sz="1050" dirty="0">
                           <a:solidFill>
                             <a:srgbClr val="1F2937"/>
                           </a:solidFill>
@@ -19972,9 +19972,9 @@
                           <a:ea typeface="Calibri" pitchFamily="34" charset="-122"/>
                           <a:cs typeface="Calibri" pitchFamily="34" charset="-120"/>
                         </a:rPr>
-                        <a:t>QVF, owner-gate store</a:t>
+                        <a:t>4 QVF, frozen Sonnet-built store v48f (batch 46d, mean of 2 runs)</a:t>
                       </a:r>
-                      <a:endParaRPr lang="en-US" sz="1100" dirty="0">
+                      <a:endParaRPr lang="en-US" sz="1050" dirty="0">
                         <a:latin typeface="Calibri" charset="0"/>
                         <a:ea typeface="Calibri" charset="0"/>
                         <a:cs typeface="Calibri" charset="0"/>
@@ -20032,7 +20032,7 @@
                         <a:buNone/>
                       </a:pPr>
                       <a:r>
-                        <a:rPr lang="en-US" sz="1100" dirty="0">
+                        <a:rPr lang="en-US" sz="1050" dirty="0">
                           <a:solidFill>
                             <a:srgbClr val="1F2937"/>
                           </a:solidFill>
@@ -20040,9 +20040,9 @@
                           <a:ea typeface="Calibri" pitchFamily="34" charset="-122"/>
                           <a:cs typeface="Calibri" pitchFamily="34" charset="-120"/>
                         </a:rPr>
-                        <a:t>86.25</a:t>
+                        <a:t>90.00</a:t>
                       </a:r>
-                      <a:endParaRPr lang="en-US" sz="1100" dirty="0">
+                      <a:endParaRPr lang="en-US" sz="1050" dirty="0">
                         <a:latin typeface="Calibri" charset="0"/>
                         <a:ea typeface="Calibri" charset="0"/>
                         <a:cs typeface="Calibri" charset="0"/>
@@ -20100,7 +20100,7 @@
                         <a:buNone/>
                       </a:pPr>
                       <a:r>
-                        <a:rPr lang="en-US" sz="1100" dirty="0">
+                        <a:rPr lang="en-US" sz="1050" dirty="0">
                           <a:solidFill>
                             <a:srgbClr val="1F2937"/>
                           </a:solidFill>
@@ -20108,9 +20108,9 @@
                           <a:ea typeface="Calibri" pitchFamily="34" charset="-122"/>
                           <a:cs typeface="Calibri" pitchFamily="34" charset="-120"/>
                         </a:rPr>
-                        <a:t>+38.9</a:t>
+                        <a:t>+42.7</a:t>
                       </a:r>
-                      <a:endParaRPr lang="en-US" sz="1100" dirty="0">
+                      <a:endParaRPr lang="en-US" sz="1050" dirty="0">
                         <a:latin typeface="Calibri" charset="0"/>
                         <a:ea typeface="Calibri" charset="0"/>
                         <a:cs typeface="Calibri" charset="0"/>
@@ -20168,7 +20168,7 @@
                         <a:buNone/>
                       </a:pPr>
                       <a:r>
-                        <a:rPr lang="en-US" sz="1100" dirty="0">
+                        <a:rPr lang="en-US" sz="1050" dirty="0">
                           <a:solidFill>
                             <a:srgbClr val="1F2937"/>
                           </a:solidFill>
@@ -20176,9 +20176,9 @@
                           <a:ea typeface="Calibri" pitchFamily="34" charset="-122"/>
                           <a:cs typeface="Calibri" pitchFamily="34" charset="-120"/>
                         </a:rPr>
-                        <a:t>2,106</a:t>
+                        <a:t>2,753</a:t>
                       </a:r>
-                      <a:endParaRPr lang="en-US" sz="1100" dirty="0">
+                      <a:endParaRPr lang="en-US" sz="1050" dirty="0">
                         <a:latin typeface="Calibri" charset="0"/>
                         <a:ea typeface="Calibri" charset="0"/>
                         <a:cs typeface="Calibri" charset="0"/>
@@ -20236,7 +20236,7 @@
                         <a:buNone/>
                       </a:pPr>
                       <a:r>
-                        <a:rPr lang="en-US" sz="1100" dirty="0">
+                        <a:rPr lang="en-US" sz="1050" dirty="0">
                           <a:solidFill>
                             <a:srgbClr val="1F2937"/>
                           </a:solidFill>
@@ -20244,9 +20244,9 @@
                           <a:ea typeface="Calibri" pitchFamily="34" charset="-122"/>
                           <a:cs typeface="Calibri" pitchFamily="34" charset="-120"/>
                         </a:rPr>
-                        <a:t>464</a:t>
+                        <a:t>485</a:t>
                       </a:r>
-                      <a:endParaRPr lang="en-US" sz="1100" dirty="0">
+                      <a:endParaRPr lang="en-US" sz="1050" dirty="0">
                         <a:latin typeface="Calibri" charset="0"/>
                         <a:ea typeface="Calibri" charset="0"/>
                         <a:cs typeface="Calibri" charset="0"/>
@@ -20304,7 +20304,7 @@
                         <a:buNone/>
                       </a:pPr>
                       <a:r>
-                        <a:rPr lang="en-US" sz="1100" dirty="0">
+                        <a:rPr lang="en-US" sz="1050" dirty="0">
                           <a:solidFill>
                             <a:srgbClr val="1F2937"/>
                           </a:solidFill>
@@ -20312,9 +20312,9 @@
                           <a:ea typeface="Calibri" pitchFamily="34" charset="-122"/>
                           <a:cs typeface="Calibri" pitchFamily="34" charset="-120"/>
                         </a:rPr>
-                        <a:t>$0.00443</a:t>
+                        <a:t>$0.00518</a:t>
                       </a:r>
-                      <a:endParaRPr lang="en-US" sz="1100" dirty="0">
+                      <a:endParaRPr lang="en-US" sz="1050" dirty="0">
                         <a:latin typeface="Calibri" charset="0"/>
                         <a:ea typeface="Calibri" charset="0"/>
                         <a:cs typeface="Calibri" charset="0"/>
@@ -20372,7 +20372,7 @@
                         <a:buNone/>
                       </a:pPr>
                       <a:r>
-                        <a:rPr lang="en-US" sz="1100" dirty="0">
+                        <a:rPr lang="en-US" sz="1050" dirty="0">
                           <a:solidFill>
                             <a:srgbClr val="1F2937"/>
                           </a:solidFill>
@@ -20380,9 +20380,9 @@
                           <a:ea typeface="Calibri" pitchFamily="34" charset="-122"/>
                           <a:cs typeface="Calibri" pitchFamily="34" charset="-120"/>
                         </a:rPr>
-                        <a:t>4.77 s</a:t>
+                        <a:t>5.77 s</a:t>
                       </a:r>
-                      <a:endParaRPr lang="en-US" sz="1100" dirty="0">
+                      <a:endParaRPr lang="en-US" sz="1050" dirty="0">
                         <a:latin typeface="Calibri" charset="0"/>
                         <a:ea typeface="Calibri" charset="0"/>
                         <a:cs typeface="Calibri" charset="0"/>
@@ -20432,7 +20432,7 @@
                   </a:tcPr>
                 </a:tc>
               </a:tr>
-              <a:tr h="365760">
+              <a:tr h="338328">
                 <a:tc>
                   <a:txBody>
                     <a:bodyPr/>
@@ -20442,7 +20442,7 @@
                         <a:buNone/>
                       </a:pPr>
                       <a:r>
-                        <a:rPr lang="en-US" sz="1100" dirty="0">
+                        <a:rPr lang="en-US" sz="1050" dirty="0">
                           <a:solidFill>
                             <a:srgbClr val="1F2937"/>
                           </a:solidFill>
@@ -20450,9 +20450,9 @@
                           <a:ea typeface="Calibri" pitchFamily="34" charset="-122"/>
                           <a:cs typeface="Calibri" pitchFamily="34" charset="-120"/>
                         </a:rPr>
-                        <a:t>Full text + protocol</a:t>
+                        <a:t>QVF, owner-gate store</a:t>
                       </a:r>
-                      <a:endParaRPr lang="en-US" sz="1100" dirty="0">
+                      <a:endParaRPr lang="en-US" sz="1050" dirty="0">
                         <a:latin typeface="Calibri" charset="0"/>
                         <a:ea typeface="Calibri" charset="0"/>
                         <a:cs typeface="Calibri" charset="0"/>
@@ -20510,7 +20510,7 @@
                         <a:buNone/>
                       </a:pPr>
                       <a:r>
-                        <a:rPr lang="en-US" sz="1100" dirty="0">
+                        <a:rPr lang="en-US" sz="1050" dirty="0">
                           <a:solidFill>
                             <a:srgbClr val="1F2937"/>
                           </a:solidFill>
@@ -20518,9 +20518,9 @@
                           <a:ea typeface="Calibri" pitchFamily="34" charset="-122"/>
                           <a:cs typeface="Calibri" pitchFamily="34" charset="-120"/>
                         </a:rPr>
-                        <a:t>86.61</a:t>
+                        <a:t>86.25</a:t>
                       </a:r>
-                      <a:endParaRPr lang="en-US" sz="1100" dirty="0">
+                      <a:endParaRPr lang="en-US" sz="1050" dirty="0">
                         <a:latin typeface="Calibri" charset="0"/>
                         <a:ea typeface="Calibri" charset="0"/>
                         <a:cs typeface="Calibri" charset="0"/>
@@ -20578,7 +20578,7 @@
                         <a:buNone/>
                       </a:pPr>
                       <a:r>
-                        <a:rPr lang="en-US" sz="1100" dirty="0">
+                        <a:rPr lang="en-US" sz="1050" dirty="0">
                           <a:solidFill>
                             <a:srgbClr val="1F2937"/>
                           </a:solidFill>
@@ -20586,9 +20586,9 @@
                           <a:ea typeface="Calibri" pitchFamily="34" charset="-122"/>
                           <a:cs typeface="Calibri" pitchFamily="34" charset="-120"/>
                         </a:rPr>
-                        <a:t>+39.3</a:t>
+                        <a:t>+38.9</a:t>
                       </a:r>
-                      <a:endParaRPr lang="en-US" sz="1100" dirty="0">
+                      <a:endParaRPr lang="en-US" sz="1050" dirty="0">
                         <a:latin typeface="Calibri" charset="0"/>
                         <a:ea typeface="Calibri" charset="0"/>
                         <a:cs typeface="Calibri" charset="0"/>
@@ -20646,7 +20646,7 @@
                         <a:buNone/>
                       </a:pPr>
                       <a:r>
-                        <a:rPr lang="en-US" sz="1100" dirty="0">
+                        <a:rPr lang="en-US" sz="1050" dirty="0">
                           <a:solidFill>
                             <a:srgbClr val="1F2937"/>
                           </a:solidFill>
@@ -20654,9 +20654,9 @@
                           <a:ea typeface="Calibri" pitchFamily="34" charset="-122"/>
                           <a:cs typeface="Calibri" pitchFamily="34" charset="-120"/>
                         </a:rPr>
-                        <a:t>13,921</a:t>
+                        <a:t>2,106</a:t>
                       </a:r>
-                      <a:endParaRPr lang="en-US" sz="1100" dirty="0">
+                      <a:endParaRPr lang="en-US" sz="1050" dirty="0">
                         <a:latin typeface="Calibri" charset="0"/>
                         <a:ea typeface="Calibri" charset="0"/>
                         <a:cs typeface="Calibri" charset="0"/>
@@ -20714,7 +20714,7 @@
                         <a:buNone/>
                       </a:pPr>
                       <a:r>
-                        <a:rPr lang="en-US" sz="1100" dirty="0">
+                        <a:rPr lang="en-US" sz="1050" dirty="0">
                           <a:solidFill>
                             <a:srgbClr val="1F2937"/>
                           </a:solidFill>
@@ -20722,9 +20722,9 @@
                           <a:ea typeface="Calibri" pitchFamily="34" charset="-122"/>
                           <a:cs typeface="Calibri" pitchFamily="34" charset="-120"/>
                         </a:rPr>
-                        <a:t>454</a:t>
+                        <a:t>464</a:t>
                       </a:r>
-                      <a:endParaRPr lang="en-US" sz="1100" dirty="0">
+                      <a:endParaRPr lang="en-US" sz="1050" dirty="0">
                         <a:latin typeface="Calibri" charset="0"/>
                         <a:ea typeface="Calibri" charset="0"/>
                         <a:cs typeface="Calibri" charset="0"/>
@@ -20782,7 +20782,7 @@
                         <a:buNone/>
                       </a:pPr>
                       <a:r>
-                        <a:rPr lang="en-US" sz="1100" dirty="0">
+                        <a:rPr lang="en-US" sz="1050" dirty="0">
                           <a:solidFill>
                             <a:srgbClr val="1F2937"/>
                           </a:solidFill>
@@ -20790,9 +20790,9 @@
                           <a:ea typeface="Calibri" pitchFamily="34" charset="-122"/>
                           <a:cs typeface="Calibri" pitchFamily="34" charset="-120"/>
                         </a:rPr>
-                        <a:t>$0.01619</a:t>
+                        <a:t>$0.00443</a:t>
                       </a:r>
-                      <a:endParaRPr lang="en-US" sz="1100" dirty="0">
+                      <a:endParaRPr lang="en-US" sz="1050" dirty="0">
                         <a:latin typeface="Calibri" charset="0"/>
                         <a:ea typeface="Calibri" charset="0"/>
                         <a:cs typeface="Calibri" charset="0"/>
@@ -20850,7 +20850,7 @@
                         <a:buNone/>
                       </a:pPr>
                       <a:r>
-                        <a:rPr lang="en-US" sz="1100" dirty="0">
+                        <a:rPr lang="en-US" sz="1050" dirty="0">
                           <a:solidFill>
                             <a:srgbClr val="1F2937"/>
                           </a:solidFill>
@@ -20858,9 +20858,9 @@
                           <a:ea typeface="Calibri" pitchFamily="34" charset="-122"/>
                           <a:cs typeface="Calibri" pitchFamily="34" charset="-120"/>
                         </a:rPr>
-                        <a:t>7.84 s</a:t>
+                        <a:t>4.77 s</a:t>
                       </a:r>
-                      <a:endParaRPr lang="en-US" sz="1100" dirty="0">
+                      <a:endParaRPr lang="en-US" sz="1050" dirty="0">
                         <a:latin typeface="Calibri" charset="0"/>
                         <a:ea typeface="Calibri" charset="0"/>
                         <a:cs typeface="Calibri" charset="0"/>
@@ -20910,7 +20910,7 @@
                   </a:tcPr>
                 </a:tc>
               </a:tr>
-              <a:tr h="365760">
+              <a:tr h="338328">
                 <a:tc>
                   <a:txBody>
                     <a:bodyPr/>
@@ -20920,7 +20920,7 @@
                         <a:buNone/>
                       </a:pPr>
                       <a:r>
-                        <a:rPr lang="en-US" sz="1100" dirty="0">
+                        <a:rPr lang="en-US" sz="1050" dirty="0">
                           <a:solidFill>
                             <a:srgbClr val="1F2937"/>
                           </a:solidFill>
@@ -20928,9 +20928,9 @@
                           <a:ea typeface="Calibri" pitchFamily="34" charset="-122"/>
                           <a:cs typeface="Calibri" pitchFamily="34" charset="-120"/>
                         </a:rPr>
-                        <a:t>Full text, plain (archived wording)</a:t>
+                        <a:t>Full text + protocol</a:t>
                       </a:r>
-                      <a:endParaRPr lang="en-US" sz="1100" dirty="0">
+                      <a:endParaRPr lang="en-US" sz="1050" dirty="0">
                         <a:latin typeface="Calibri" charset="0"/>
                         <a:ea typeface="Calibri" charset="0"/>
                         <a:cs typeface="Calibri" charset="0"/>
@@ -20988,7 +20988,7 @@
                         <a:buNone/>
                       </a:pPr>
                       <a:r>
-                        <a:rPr lang="en-US" sz="1100" dirty="0">
+                        <a:rPr lang="en-US" sz="1050" dirty="0">
                           <a:solidFill>
                             <a:srgbClr val="1F2937"/>
                           </a:solidFill>
@@ -20996,9 +20996,9 @@
                           <a:ea typeface="Calibri" pitchFamily="34" charset="-122"/>
                           <a:cs typeface="Calibri" pitchFamily="34" charset="-120"/>
                         </a:rPr>
-                        <a:t>54.46</a:t>
+                        <a:t>86.61</a:t>
                       </a:r>
-                      <a:endParaRPr lang="en-US" sz="1100" dirty="0">
+                      <a:endParaRPr lang="en-US" sz="1050" dirty="0">
                         <a:latin typeface="Calibri" charset="0"/>
                         <a:ea typeface="Calibri" charset="0"/>
                         <a:cs typeface="Calibri" charset="0"/>
@@ -21056,7 +21056,7 @@
                         <a:buNone/>
                       </a:pPr>
                       <a:r>
-                        <a:rPr lang="en-US" sz="1100" dirty="0">
+                        <a:rPr lang="en-US" sz="1050" dirty="0">
                           <a:solidFill>
                             <a:srgbClr val="1F2937"/>
                           </a:solidFill>
@@ -21064,9 +21064,9 @@
                           <a:ea typeface="Calibri" pitchFamily="34" charset="-122"/>
                           <a:cs typeface="Calibri" pitchFamily="34" charset="-120"/>
                         </a:rPr>
-                        <a:t>+7.1</a:t>
+                        <a:t>+39.3</a:t>
                       </a:r>
-                      <a:endParaRPr lang="en-US" sz="1100" dirty="0">
+                      <a:endParaRPr lang="en-US" sz="1050" dirty="0">
                         <a:latin typeface="Calibri" charset="0"/>
                         <a:ea typeface="Calibri" charset="0"/>
                         <a:cs typeface="Calibri" charset="0"/>
@@ -21124,7 +21124,7 @@
                         <a:buNone/>
                       </a:pPr>
                       <a:r>
-                        <a:rPr lang="en-US" sz="1100" dirty="0">
+                        <a:rPr lang="en-US" sz="1050" dirty="0">
                           <a:solidFill>
                             <a:srgbClr val="1F2937"/>
                           </a:solidFill>
@@ -21132,9 +21132,9 @@
                           <a:ea typeface="Calibri" pitchFamily="34" charset="-122"/>
                           <a:cs typeface="Calibri" pitchFamily="34" charset="-120"/>
                         </a:rPr>
-                        <a:t>13,672</a:t>
+                        <a:t>13,921</a:t>
                       </a:r>
-                      <a:endParaRPr lang="en-US" sz="1100" dirty="0">
+                      <a:endParaRPr lang="en-US" sz="1050" dirty="0">
                         <a:latin typeface="Calibri" charset="0"/>
                         <a:ea typeface="Calibri" charset="0"/>
                         <a:cs typeface="Calibri" charset="0"/>
@@ -21192,7 +21192,7 @@
                         <a:buNone/>
                       </a:pPr>
                       <a:r>
-                        <a:rPr lang="en-US" sz="1100" dirty="0">
+                        <a:rPr lang="en-US" sz="1050" dirty="0">
                           <a:solidFill>
                             <a:srgbClr val="1F2937"/>
                           </a:solidFill>
@@ -21200,9 +21200,9 @@
                           <a:ea typeface="Calibri" pitchFamily="34" charset="-122"/>
                           <a:cs typeface="Calibri" pitchFamily="34" charset="-120"/>
                         </a:rPr>
-                        <a:t>136</a:t>
+                        <a:t>454</a:t>
                       </a:r>
-                      <a:endParaRPr lang="en-US" sz="1100" dirty="0">
+                      <a:endParaRPr lang="en-US" sz="1050" dirty="0">
                         <a:latin typeface="Calibri" charset="0"/>
                         <a:ea typeface="Calibri" charset="0"/>
                         <a:cs typeface="Calibri" charset="0"/>
@@ -21260,7 +21260,7 @@
                         <a:buNone/>
                       </a:pPr>
                       <a:r>
-                        <a:rPr lang="en-US" sz="1100" dirty="0">
+                        <a:rPr lang="en-US" sz="1050" dirty="0">
                           <a:solidFill>
                             <a:srgbClr val="1F2937"/>
                           </a:solidFill>
@@ -21268,9 +21268,9 @@
                           <a:ea typeface="Calibri" pitchFamily="34" charset="-122"/>
                           <a:cs typeface="Calibri" pitchFamily="34" charset="-120"/>
                         </a:rPr>
-                        <a:t>$0.01435</a:t>
+                        <a:t>$0.01619</a:t>
                       </a:r>
-                      <a:endParaRPr lang="en-US" sz="1100" dirty="0">
+                      <a:endParaRPr lang="en-US" sz="1050" dirty="0">
                         <a:latin typeface="Calibri" charset="0"/>
                         <a:ea typeface="Calibri" charset="0"/>
                         <a:cs typeface="Calibri" charset="0"/>
@@ -21328,7 +21328,7 @@
                         <a:buNone/>
                       </a:pPr>
                       <a:r>
-                        <a:rPr lang="en-US" sz="1100" dirty="0">
+                        <a:rPr lang="en-US" sz="1050" dirty="0">
                           <a:solidFill>
                             <a:srgbClr val="1F2937"/>
                           </a:solidFill>
@@ -21336,9 +21336,9 @@
                           <a:ea typeface="Calibri" pitchFamily="34" charset="-122"/>
                           <a:cs typeface="Calibri" pitchFamily="34" charset="-120"/>
                         </a:rPr>
-                        <a:t>5.46 s</a:t>
+                        <a:t>7.84 s</a:t>
                       </a:r>
-                      <a:endParaRPr lang="en-US" sz="1100" dirty="0">
+                      <a:endParaRPr lang="en-US" sz="1050" dirty="0">
                         <a:latin typeface="Calibri" charset="0"/>
                         <a:ea typeface="Calibri" charset="0"/>
                         <a:cs typeface="Calibri" charset="0"/>
@@ -21388,7 +21388,7 @@
                   </a:tcPr>
                 </a:tc>
               </a:tr>
-              <a:tr h="365760">
+              <a:tr h="338328">
                 <a:tc>
                   <a:txBody>
                     <a:bodyPr/>
@@ -21398,7 +21398,7 @@
                         <a:buNone/>
                       </a:pPr>
                       <a:r>
-                        <a:rPr lang="en-US" sz="1100" dirty="0">
+                        <a:rPr lang="en-US" sz="1050" dirty="0">
                           <a:solidFill>
                             <a:srgbClr val="1F2937"/>
                           </a:solidFill>
@@ -21406,9 +21406,9 @@
                           <a:ea typeface="Calibri" pitchFamily="34" charset="-122"/>
                           <a:cs typeface="Calibri" pitchFamily="34" charset="-120"/>
                         </a:rPr>
-                        <a:t>Unstructured summary</a:t>
+                        <a:t>Full text, plain (archived wording)</a:t>
                       </a:r>
-                      <a:endParaRPr lang="en-US" sz="1100" dirty="0">
+                      <a:endParaRPr lang="en-US" sz="1050" dirty="0">
                         <a:latin typeface="Calibri" charset="0"/>
                         <a:ea typeface="Calibri" charset="0"/>
                         <a:cs typeface="Calibri" charset="0"/>
@@ -21466,7 +21466,7 @@
                         <a:buNone/>
                       </a:pPr>
                       <a:r>
-                        <a:rPr lang="en-US" sz="1100" dirty="0">
+                        <a:rPr lang="en-US" sz="1050" dirty="0">
                           <a:solidFill>
                             <a:srgbClr val="1F2937"/>
                           </a:solidFill>
@@ -21474,9 +21474,9 @@
                           <a:ea typeface="Calibri" pitchFamily="34" charset="-122"/>
                           <a:cs typeface="Calibri" pitchFamily="34" charset="-120"/>
                         </a:rPr>
-                        <a:t>57.68</a:t>
+                        <a:t>54.46</a:t>
                       </a:r>
-                      <a:endParaRPr lang="en-US" sz="1100" dirty="0">
+                      <a:endParaRPr lang="en-US" sz="1050" dirty="0">
                         <a:latin typeface="Calibri" charset="0"/>
                         <a:ea typeface="Calibri" charset="0"/>
                         <a:cs typeface="Calibri" charset="0"/>
@@ -21534,7 +21534,7 @@
                         <a:buNone/>
                       </a:pPr>
                       <a:r>
-                        <a:rPr lang="en-US" sz="1100" dirty="0">
+                        <a:rPr lang="en-US" sz="1050" dirty="0">
                           <a:solidFill>
                             <a:srgbClr val="1F2937"/>
                           </a:solidFill>
@@ -21542,9 +21542,9 @@
                           <a:ea typeface="Calibri" pitchFamily="34" charset="-122"/>
                           <a:cs typeface="Calibri" pitchFamily="34" charset="-120"/>
                         </a:rPr>
-                        <a:t>+10.4</a:t>
+                        <a:t>+7.1</a:t>
                       </a:r>
-                      <a:endParaRPr lang="en-US" sz="1100" dirty="0">
+                      <a:endParaRPr lang="en-US" sz="1050" dirty="0">
                         <a:latin typeface="Calibri" charset="0"/>
                         <a:ea typeface="Calibri" charset="0"/>
                         <a:cs typeface="Calibri" charset="0"/>
@@ -21602,7 +21602,7 @@
                         <a:buNone/>
                       </a:pPr>
                       <a:r>
-                        <a:rPr lang="en-US" sz="1100" dirty="0">
+                        <a:rPr lang="en-US" sz="1050" dirty="0">
                           <a:solidFill>
                             <a:srgbClr val="1F2937"/>
                           </a:solidFill>
@@ -21610,9 +21610,9 @@
                           <a:ea typeface="Calibri" pitchFamily="34" charset="-122"/>
                           <a:cs typeface="Calibri" pitchFamily="34" charset="-120"/>
                         </a:rPr>
-                        <a:t>2,451</a:t>
+                        <a:t>13,672</a:t>
                       </a:r>
-                      <a:endParaRPr lang="en-US" sz="1100" dirty="0">
+                      <a:endParaRPr lang="en-US" sz="1050" dirty="0">
                         <a:latin typeface="Calibri" charset="0"/>
                         <a:ea typeface="Calibri" charset="0"/>
                         <a:cs typeface="Calibri" charset="0"/>
@@ -21670,7 +21670,7 @@
                         <a:buNone/>
                       </a:pPr>
                       <a:r>
-                        <a:rPr lang="en-US" sz="1100" dirty="0">
+                        <a:rPr lang="en-US" sz="1050" dirty="0">
                           <a:solidFill>
                             <a:srgbClr val="1F2937"/>
                           </a:solidFill>
@@ -21678,9 +21678,9 @@
                           <a:ea typeface="Calibri" pitchFamily="34" charset="-122"/>
                           <a:cs typeface="Calibri" pitchFamily="34" charset="-120"/>
                         </a:rPr>
-                        <a:t>91</a:t>
+                        <a:t>136</a:t>
                       </a:r>
-                      <a:endParaRPr lang="en-US" sz="1100" dirty="0">
+                      <a:endParaRPr lang="en-US" sz="1050" dirty="0">
                         <a:latin typeface="Calibri" charset="0"/>
                         <a:ea typeface="Calibri" charset="0"/>
                         <a:cs typeface="Calibri" charset="0"/>
@@ -21738,7 +21738,7 @@
                         <a:buNone/>
                       </a:pPr>
                       <a:r>
-                        <a:rPr lang="en-US" sz="1100" dirty="0">
+                        <a:rPr lang="en-US" sz="1050" dirty="0">
                           <a:solidFill>
                             <a:srgbClr val="1F2937"/>
                           </a:solidFill>
@@ -21746,9 +21746,9 @@
                           <a:ea typeface="Calibri" pitchFamily="34" charset="-122"/>
                           <a:cs typeface="Calibri" pitchFamily="34" charset="-120"/>
                         </a:rPr>
-                        <a:t>$0.00291</a:t>
+                        <a:t>$0.01435</a:t>
                       </a:r>
-                      <a:endParaRPr lang="en-US" sz="1100" dirty="0">
+                      <a:endParaRPr lang="en-US" sz="1050" dirty="0">
                         <a:latin typeface="Calibri" charset="0"/>
                         <a:ea typeface="Calibri" charset="0"/>
                         <a:cs typeface="Calibri" charset="0"/>
@@ -21806,7 +21806,485 @@
                         <a:buNone/>
                       </a:pPr>
                       <a:r>
-                        <a:rPr lang="en-US" sz="1100" dirty="0">
+                        <a:rPr lang="en-US" sz="1050" dirty="0">
+                          <a:solidFill>
+                            <a:srgbClr val="1F2937"/>
+                          </a:solidFill>
+                          <a:latin typeface="Calibri" pitchFamily="34" charset="0"/>
+                          <a:ea typeface="Calibri" pitchFamily="34" charset="-122"/>
+                          <a:cs typeface="Calibri" pitchFamily="34" charset="-120"/>
+                        </a:rPr>
+                        <a:t>5.46 s</a:t>
+                      </a:r>
+                      <a:endParaRPr lang="en-US" sz="1050" dirty="0">
+                        <a:latin typeface="Calibri" charset="0"/>
+                        <a:ea typeface="Calibri" charset="0"/>
+                        <a:cs typeface="Calibri" charset="0"/>
+                      </a:endParaRPr>
+                    </a:p>
+                  </a:txBody>
+                  <a:tcPr marL="36576" marR="36576" marT="36576" marB="36576" anchor="ctr">
+                    <a:lnL w="6350" cap="flat" cmpd="sng" algn="ctr">
+                      <a:solidFill>
+                        <a:srgbClr val="D1D5DB"/>
+                      </a:solidFill>
+                      <a:prstDash val="solid"/>
+                      <a:round/>
+                      <a:headEnd type="none" w="med" len="med"/>
+                      <a:tailEnd type="none" w="med" len="med"/>
+                    </a:lnL>
+                    <a:lnR w="6350" cap="flat" cmpd="sng" algn="ctr">
+                      <a:solidFill>
+                        <a:srgbClr val="D1D5DB"/>
+                      </a:solidFill>
+                      <a:prstDash val="solid"/>
+                      <a:round/>
+                      <a:headEnd type="none" w="med" len="med"/>
+                      <a:tailEnd type="none" w="med" len="med"/>
+                    </a:lnR>
+                    <a:lnT w="6350" cap="flat" cmpd="sng" algn="ctr">
+                      <a:solidFill>
+                        <a:srgbClr val="D1D5DB"/>
+                      </a:solidFill>
+                      <a:prstDash val="solid"/>
+                      <a:round/>
+                      <a:headEnd type="none" w="med" len="med"/>
+                      <a:tailEnd type="none" w="med" len="med"/>
+                    </a:lnT>
+                    <a:lnB w="6350" cap="flat" cmpd="sng" algn="ctr">
+                      <a:solidFill>
+                        <a:srgbClr val="D1D5DB"/>
+                      </a:solidFill>
+                      <a:prstDash val="solid"/>
+                      <a:round/>
+                      <a:headEnd type="none" w="med" len="med"/>
+                      <a:tailEnd type="none" w="med" len="med"/>
+                    </a:lnB>
+                    <a:solidFill>
+                      <a:srgbClr val="FFFFFF"/>
+                    </a:solidFill>
+                  </a:tcPr>
+                </a:tc>
+              </a:tr>
+              <a:tr h="338328">
+                <a:tc>
+                  <a:txBody>
+                    <a:bodyPr/>
+                    <a:lstStyle/>
+                    <a:p>
+                      <a:pPr algn="l" indent="0" marL="0">
+                        <a:buNone/>
+                      </a:pPr>
+                      <a:r>
+                        <a:rPr lang="en-US" sz="1050" dirty="0">
+                          <a:solidFill>
+                            <a:srgbClr val="1F2937"/>
+                          </a:solidFill>
+                          <a:latin typeface="Calibri" pitchFamily="34" charset="0"/>
+                          <a:ea typeface="Calibri" pitchFamily="34" charset="-122"/>
+                          <a:cs typeface="Calibri" pitchFamily="34" charset="-120"/>
+                        </a:rPr>
+                        <a:t>Unstructured summary</a:t>
+                      </a:r>
+                      <a:endParaRPr lang="en-US" sz="1050" dirty="0">
+                        <a:latin typeface="Calibri" charset="0"/>
+                        <a:ea typeface="Calibri" charset="0"/>
+                        <a:cs typeface="Calibri" charset="0"/>
+                      </a:endParaRPr>
+                    </a:p>
+                  </a:txBody>
+                  <a:tcPr marL="36576" marR="36576" marT="36576" marB="36576" anchor="ctr">
+                    <a:lnL w="6350" cap="flat" cmpd="sng" algn="ctr">
+                      <a:solidFill>
+                        <a:srgbClr val="D1D5DB"/>
+                      </a:solidFill>
+                      <a:prstDash val="solid"/>
+                      <a:round/>
+                      <a:headEnd type="none" w="med" len="med"/>
+                      <a:tailEnd type="none" w="med" len="med"/>
+                    </a:lnL>
+                    <a:lnR w="6350" cap="flat" cmpd="sng" algn="ctr">
+                      <a:solidFill>
+                        <a:srgbClr val="D1D5DB"/>
+                      </a:solidFill>
+                      <a:prstDash val="solid"/>
+                      <a:round/>
+                      <a:headEnd type="none" w="med" len="med"/>
+                      <a:tailEnd type="none" w="med" len="med"/>
+                    </a:lnR>
+                    <a:lnT w="6350" cap="flat" cmpd="sng" algn="ctr">
+                      <a:solidFill>
+                        <a:srgbClr val="D1D5DB"/>
+                      </a:solidFill>
+                      <a:prstDash val="solid"/>
+                      <a:round/>
+                      <a:headEnd type="none" w="med" len="med"/>
+                      <a:tailEnd type="none" w="med" len="med"/>
+                    </a:lnT>
+                    <a:lnB w="6350" cap="flat" cmpd="sng" algn="ctr">
+                      <a:solidFill>
+                        <a:srgbClr val="D1D5DB"/>
+                      </a:solidFill>
+                      <a:prstDash val="solid"/>
+                      <a:round/>
+                      <a:headEnd type="none" w="med" len="med"/>
+                      <a:tailEnd type="none" w="med" len="med"/>
+                    </a:lnB>
+                    <a:solidFill>
+                      <a:srgbClr val="F5F7FA"/>
+                    </a:solidFill>
+                  </a:tcPr>
+                </a:tc>
+                <a:tc>
+                  <a:txBody>
+                    <a:bodyPr/>
+                    <a:lstStyle/>
+                    <a:p>
+                      <a:pPr algn="ctr" indent="0" marL="0">
+                        <a:buNone/>
+                      </a:pPr>
+                      <a:r>
+                        <a:rPr lang="en-US" sz="1050" dirty="0">
+                          <a:solidFill>
+                            <a:srgbClr val="1F2937"/>
+                          </a:solidFill>
+                          <a:latin typeface="Calibri" pitchFamily="34" charset="0"/>
+                          <a:ea typeface="Calibri" pitchFamily="34" charset="-122"/>
+                          <a:cs typeface="Calibri" pitchFamily="34" charset="-120"/>
+                        </a:rPr>
+                        <a:t>57.68</a:t>
+                      </a:r>
+                      <a:endParaRPr lang="en-US" sz="1050" dirty="0">
+                        <a:latin typeface="Calibri" charset="0"/>
+                        <a:ea typeface="Calibri" charset="0"/>
+                        <a:cs typeface="Calibri" charset="0"/>
+                      </a:endParaRPr>
+                    </a:p>
+                  </a:txBody>
+                  <a:tcPr marL="36576" marR="36576" marT="36576" marB="36576" anchor="ctr">
+                    <a:lnL w="6350" cap="flat" cmpd="sng" algn="ctr">
+                      <a:solidFill>
+                        <a:srgbClr val="D1D5DB"/>
+                      </a:solidFill>
+                      <a:prstDash val="solid"/>
+                      <a:round/>
+                      <a:headEnd type="none" w="med" len="med"/>
+                      <a:tailEnd type="none" w="med" len="med"/>
+                    </a:lnL>
+                    <a:lnR w="6350" cap="flat" cmpd="sng" algn="ctr">
+                      <a:solidFill>
+                        <a:srgbClr val="D1D5DB"/>
+                      </a:solidFill>
+                      <a:prstDash val="solid"/>
+                      <a:round/>
+                      <a:headEnd type="none" w="med" len="med"/>
+                      <a:tailEnd type="none" w="med" len="med"/>
+                    </a:lnR>
+                    <a:lnT w="6350" cap="flat" cmpd="sng" algn="ctr">
+                      <a:solidFill>
+                        <a:srgbClr val="D1D5DB"/>
+                      </a:solidFill>
+                      <a:prstDash val="solid"/>
+                      <a:round/>
+                      <a:headEnd type="none" w="med" len="med"/>
+                      <a:tailEnd type="none" w="med" len="med"/>
+                    </a:lnT>
+                    <a:lnB w="6350" cap="flat" cmpd="sng" algn="ctr">
+                      <a:solidFill>
+                        <a:srgbClr val="D1D5DB"/>
+                      </a:solidFill>
+                      <a:prstDash val="solid"/>
+                      <a:round/>
+                      <a:headEnd type="none" w="med" len="med"/>
+                      <a:tailEnd type="none" w="med" len="med"/>
+                    </a:lnB>
+                    <a:solidFill>
+                      <a:srgbClr val="F5F7FA"/>
+                    </a:solidFill>
+                  </a:tcPr>
+                </a:tc>
+                <a:tc>
+                  <a:txBody>
+                    <a:bodyPr/>
+                    <a:lstStyle/>
+                    <a:p>
+                      <a:pPr algn="ctr" indent="0" marL="0">
+                        <a:buNone/>
+                      </a:pPr>
+                      <a:r>
+                        <a:rPr lang="en-US" sz="1050" dirty="0">
+                          <a:solidFill>
+                            <a:srgbClr val="1F2937"/>
+                          </a:solidFill>
+                          <a:latin typeface="Calibri" pitchFamily="34" charset="0"/>
+                          <a:ea typeface="Calibri" pitchFamily="34" charset="-122"/>
+                          <a:cs typeface="Calibri" pitchFamily="34" charset="-120"/>
+                        </a:rPr>
+                        <a:t>+10.4</a:t>
+                      </a:r>
+                      <a:endParaRPr lang="en-US" sz="1050" dirty="0">
+                        <a:latin typeface="Calibri" charset="0"/>
+                        <a:ea typeface="Calibri" charset="0"/>
+                        <a:cs typeface="Calibri" charset="0"/>
+                      </a:endParaRPr>
+                    </a:p>
+                  </a:txBody>
+                  <a:tcPr marL="36576" marR="36576" marT="36576" marB="36576" anchor="ctr">
+                    <a:lnL w="6350" cap="flat" cmpd="sng" algn="ctr">
+                      <a:solidFill>
+                        <a:srgbClr val="D1D5DB"/>
+                      </a:solidFill>
+                      <a:prstDash val="solid"/>
+                      <a:round/>
+                      <a:headEnd type="none" w="med" len="med"/>
+                      <a:tailEnd type="none" w="med" len="med"/>
+                    </a:lnL>
+                    <a:lnR w="6350" cap="flat" cmpd="sng" algn="ctr">
+                      <a:solidFill>
+                        <a:srgbClr val="D1D5DB"/>
+                      </a:solidFill>
+                      <a:prstDash val="solid"/>
+                      <a:round/>
+                      <a:headEnd type="none" w="med" len="med"/>
+                      <a:tailEnd type="none" w="med" len="med"/>
+                    </a:lnR>
+                    <a:lnT w="6350" cap="flat" cmpd="sng" algn="ctr">
+                      <a:solidFill>
+                        <a:srgbClr val="D1D5DB"/>
+                      </a:solidFill>
+                      <a:prstDash val="solid"/>
+                      <a:round/>
+                      <a:headEnd type="none" w="med" len="med"/>
+                      <a:tailEnd type="none" w="med" len="med"/>
+                    </a:lnT>
+                    <a:lnB w="6350" cap="flat" cmpd="sng" algn="ctr">
+                      <a:solidFill>
+                        <a:srgbClr val="D1D5DB"/>
+                      </a:solidFill>
+                      <a:prstDash val="solid"/>
+                      <a:round/>
+                      <a:headEnd type="none" w="med" len="med"/>
+                      <a:tailEnd type="none" w="med" len="med"/>
+                    </a:lnB>
+                    <a:solidFill>
+                      <a:srgbClr val="F5F7FA"/>
+                    </a:solidFill>
+                  </a:tcPr>
+                </a:tc>
+                <a:tc>
+                  <a:txBody>
+                    <a:bodyPr/>
+                    <a:lstStyle/>
+                    <a:p>
+                      <a:pPr algn="ctr" indent="0" marL="0">
+                        <a:buNone/>
+                      </a:pPr>
+                      <a:r>
+                        <a:rPr lang="en-US" sz="1050" dirty="0">
+                          <a:solidFill>
+                            <a:srgbClr val="1F2937"/>
+                          </a:solidFill>
+                          <a:latin typeface="Calibri" pitchFamily="34" charset="0"/>
+                          <a:ea typeface="Calibri" pitchFamily="34" charset="-122"/>
+                          <a:cs typeface="Calibri" pitchFamily="34" charset="-120"/>
+                        </a:rPr>
+                        <a:t>2,451</a:t>
+                      </a:r>
+                      <a:endParaRPr lang="en-US" sz="1050" dirty="0">
+                        <a:latin typeface="Calibri" charset="0"/>
+                        <a:ea typeface="Calibri" charset="0"/>
+                        <a:cs typeface="Calibri" charset="0"/>
+                      </a:endParaRPr>
+                    </a:p>
+                  </a:txBody>
+                  <a:tcPr marL="36576" marR="36576" marT="36576" marB="36576" anchor="ctr">
+                    <a:lnL w="6350" cap="flat" cmpd="sng" algn="ctr">
+                      <a:solidFill>
+                        <a:srgbClr val="D1D5DB"/>
+                      </a:solidFill>
+                      <a:prstDash val="solid"/>
+                      <a:round/>
+                      <a:headEnd type="none" w="med" len="med"/>
+                      <a:tailEnd type="none" w="med" len="med"/>
+                    </a:lnL>
+                    <a:lnR w="6350" cap="flat" cmpd="sng" algn="ctr">
+                      <a:solidFill>
+                        <a:srgbClr val="D1D5DB"/>
+                      </a:solidFill>
+                      <a:prstDash val="solid"/>
+                      <a:round/>
+                      <a:headEnd type="none" w="med" len="med"/>
+                      <a:tailEnd type="none" w="med" len="med"/>
+                    </a:lnR>
+                    <a:lnT w="6350" cap="flat" cmpd="sng" algn="ctr">
+                      <a:solidFill>
+                        <a:srgbClr val="D1D5DB"/>
+                      </a:solidFill>
+                      <a:prstDash val="solid"/>
+                      <a:round/>
+                      <a:headEnd type="none" w="med" len="med"/>
+                      <a:tailEnd type="none" w="med" len="med"/>
+                    </a:lnT>
+                    <a:lnB w="6350" cap="flat" cmpd="sng" algn="ctr">
+                      <a:solidFill>
+                        <a:srgbClr val="D1D5DB"/>
+                      </a:solidFill>
+                      <a:prstDash val="solid"/>
+                      <a:round/>
+                      <a:headEnd type="none" w="med" len="med"/>
+                      <a:tailEnd type="none" w="med" len="med"/>
+                    </a:lnB>
+                    <a:solidFill>
+                      <a:srgbClr val="F5F7FA"/>
+                    </a:solidFill>
+                  </a:tcPr>
+                </a:tc>
+                <a:tc>
+                  <a:txBody>
+                    <a:bodyPr/>
+                    <a:lstStyle/>
+                    <a:p>
+                      <a:pPr algn="ctr" indent="0" marL="0">
+                        <a:buNone/>
+                      </a:pPr>
+                      <a:r>
+                        <a:rPr lang="en-US" sz="1050" dirty="0">
+                          <a:solidFill>
+                            <a:srgbClr val="1F2937"/>
+                          </a:solidFill>
+                          <a:latin typeface="Calibri" pitchFamily="34" charset="0"/>
+                          <a:ea typeface="Calibri" pitchFamily="34" charset="-122"/>
+                          <a:cs typeface="Calibri" pitchFamily="34" charset="-120"/>
+                        </a:rPr>
+                        <a:t>91</a:t>
+                      </a:r>
+                      <a:endParaRPr lang="en-US" sz="1050" dirty="0">
+                        <a:latin typeface="Calibri" charset="0"/>
+                        <a:ea typeface="Calibri" charset="0"/>
+                        <a:cs typeface="Calibri" charset="0"/>
+                      </a:endParaRPr>
+                    </a:p>
+                  </a:txBody>
+                  <a:tcPr marL="36576" marR="36576" marT="36576" marB="36576" anchor="ctr">
+                    <a:lnL w="6350" cap="flat" cmpd="sng" algn="ctr">
+                      <a:solidFill>
+                        <a:srgbClr val="D1D5DB"/>
+                      </a:solidFill>
+                      <a:prstDash val="solid"/>
+                      <a:round/>
+                      <a:headEnd type="none" w="med" len="med"/>
+                      <a:tailEnd type="none" w="med" len="med"/>
+                    </a:lnL>
+                    <a:lnR w="6350" cap="flat" cmpd="sng" algn="ctr">
+                      <a:solidFill>
+                        <a:srgbClr val="D1D5DB"/>
+                      </a:solidFill>
+                      <a:prstDash val="solid"/>
+                      <a:round/>
+                      <a:headEnd type="none" w="med" len="med"/>
+                      <a:tailEnd type="none" w="med" len="med"/>
+                    </a:lnR>
+                    <a:lnT w="6350" cap="flat" cmpd="sng" algn="ctr">
+                      <a:solidFill>
+                        <a:srgbClr val="D1D5DB"/>
+                      </a:solidFill>
+                      <a:prstDash val="solid"/>
+                      <a:round/>
+                      <a:headEnd type="none" w="med" len="med"/>
+                      <a:tailEnd type="none" w="med" len="med"/>
+                    </a:lnT>
+                    <a:lnB w="6350" cap="flat" cmpd="sng" algn="ctr">
+                      <a:solidFill>
+                        <a:srgbClr val="D1D5DB"/>
+                      </a:solidFill>
+                      <a:prstDash val="solid"/>
+                      <a:round/>
+                      <a:headEnd type="none" w="med" len="med"/>
+                      <a:tailEnd type="none" w="med" len="med"/>
+                    </a:lnB>
+                    <a:solidFill>
+                      <a:srgbClr val="F5F7FA"/>
+                    </a:solidFill>
+                  </a:tcPr>
+                </a:tc>
+                <a:tc>
+                  <a:txBody>
+                    <a:bodyPr/>
+                    <a:lstStyle/>
+                    <a:p>
+                      <a:pPr algn="ctr" indent="0" marL="0">
+                        <a:buNone/>
+                      </a:pPr>
+                      <a:r>
+                        <a:rPr lang="en-US" sz="1050" dirty="0">
+                          <a:solidFill>
+                            <a:srgbClr val="1F2937"/>
+                          </a:solidFill>
+                          <a:latin typeface="Calibri" pitchFamily="34" charset="0"/>
+                          <a:ea typeface="Calibri" pitchFamily="34" charset="-122"/>
+                          <a:cs typeface="Calibri" pitchFamily="34" charset="-120"/>
+                        </a:rPr>
+                        <a:t>$0.00291</a:t>
+                      </a:r>
+                      <a:endParaRPr lang="en-US" sz="1050" dirty="0">
+                        <a:latin typeface="Calibri" charset="0"/>
+                        <a:ea typeface="Calibri" charset="0"/>
+                        <a:cs typeface="Calibri" charset="0"/>
+                      </a:endParaRPr>
+                    </a:p>
+                  </a:txBody>
+                  <a:tcPr marL="36576" marR="36576" marT="36576" marB="36576" anchor="ctr">
+                    <a:lnL w="6350" cap="flat" cmpd="sng" algn="ctr">
+                      <a:solidFill>
+                        <a:srgbClr val="D1D5DB"/>
+                      </a:solidFill>
+                      <a:prstDash val="solid"/>
+                      <a:round/>
+                      <a:headEnd type="none" w="med" len="med"/>
+                      <a:tailEnd type="none" w="med" len="med"/>
+                    </a:lnL>
+                    <a:lnR w="6350" cap="flat" cmpd="sng" algn="ctr">
+                      <a:solidFill>
+                        <a:srgbClr val="D1D5DB"/>
+                      </a:solidFill>
+                      <a:prstDash val="solid"/>
+                      <a:round/>
+                      <a:headEnd type="none" w="med" len="med"/>
+                      <a:tailEnd type="none" w="med" len="med"/>
+                    </a:lnR>
+                    <a:lnT w="6350" cap="flat" cmpd="sng" algn="ctr">
+                      <a:solidFill>
+                        <a:srgbClr val="D1D5DB"/>
+                      </a:solidFill>
+                      <a:prstDash val="solid"/>
+                      <a:round/>
+                      <a:headEnd type="none" w="med" len="med"/>
+                      <a:tailEnd type="none" w="med" len="med"/>
+                    </a:lnT>
+                    <a:lnB w="6350" cap="flat" cmpd="sng" algn="ctr">
+                      <a:solidFill>
+                        <a:srgbClr val="D1D5DB"/>
+                      </a:solidFill>
+                      <a:prstDash val="solid"/>
+                      <a:round/>
+                      <a:headEnd type="none" w="med" len="med"/>
+                      <a:tailEnd type="none" w="med" len="med"/>
+                    </a:lnB>
+                    <a:solidFill>
+                      <a:srgbClr val="F5F7FA"/>
+                    </a:solidFill>
+                  </a:tcPr>
+                </a:tc>
+                <a:tc>
+                  <a:txBody>
+                    <a:bodyPr/>
+                    <a:lstStyle/>
+                    <a:p>
+                      <a:pPr algn="ctr" indent="0" marL="0">
+                        <a:buNone/>
+                      </a:pPr>
+                      <a:r>
+                        <a:rPr lang="en-US" sz="1050" dirty="0">
                           <a:solidFill>
                             <a:srgbClr val="1F2937"/>
                           </a:solidFill>
@@ -21816,7 +22294,7 @@
                         </a:rPr>
                         <a:t>4.88 s</a:t>
                       </a:r>
-                      <a:endParaRPr lang="en-US" sz="1100" dirty="0">
+                      <a:endParaRPr lang="en-US" sz="1050" dirty="0">
                         <a:latin typeface="Calibri" charset="0"/>
                         <a:ea typeface="Calibri" charset="0"/>
                         <a:cs typeface="Calibri" charset="0"/>
@@ -21861,7 +22339,7 @@
                       <a:tailEnd type="none" w="med" len="med"/>
                     </a:lnB>
                     <a:solidFill>
-                      <a:srgbClr val="FFFFFF"/>
+                      <a:srgbClr val="F5F7FA"/>
                     </a:solidFill>
                   </a:tcPr>
                 </a:tc>
@@ -36977,7 +37455,7 @@
                 <a:ea typeface="Calibri" pitchFamily="34" charset="-122"/>
                 <a:cs typeface="Calibri" pitchFamily="34" charset="-120"/>
               </a:rPr>
-              <a:t>Synthetic dialogue; assistant turns stored truncated; human agreement fair (α 0.45 / 0.30); the v2.5 human review is in progress; write-side extraction is nondeterministic (two passes overlap 2–33%); reader run-to-run sd ≤ 1.6 pp; the 104K strong-reader advantage of the projection is per-question significant but not at store level.</a:t>
+              <a:t>Synthetic dialogue; assistant turns stored truncated; human agreement fair (α 0.45 / 0.30); the v2.5 human review is in progress; write-side extraction is nondeterministic (two passes overlap 2–33%); reader run-to-run sd ≤ 1.6 pp; the 104K strong-reader advantage of the projection is per-question significant but not at store level; write-side gains measured on the 36-chain sample (+4 to +8) did not reproduce on all 144 chains (+0.7, n.s.).</a:t>
             </a:r>
             <a:endParaRPr lang="en-US" sz="1150" dirty="0"/>
           </a:p>
@@ -37101,7 +37579,7 @@
                 <a:ea typeface="Calibri" pitchFamily="34" charset="-122"/>
                 <a:cs typeface="Calibri" pitchFamily="34" charset="-120"/>
               </a:rPr>
-              <a:t>Frozen write-side configuration (Sonnet extractor + assertion-type filter + gold-free second pass) on all 144 chains, 560 questions run twice, paired against the haiku store (batch 46d, running); then more 104K stores so the strong-reader store-level CI closes.</a:t>
+              <a:t>Batch 46d done: the frozen write-side configuration on all 144 chains improves the ledger (missing gold rows 71 → 14, ceiling 85.9 → 92.5, tokens −6%) but not haiku accuracy (90.0 vs 89.3, p = 0.80); next is a certify-aware render path, then more 104K stores so the strong-reader store-level CI closes.</a:t>
             </a:r>
             <a:endParaRPr lang="en-US" sz="1150" dirty="0"/>
           </a:p>
